--- a/usecases/ai_pipeline 2/docs/Apex_Metrics_Discussion.pptx
+++ b/usecases/ai_pipeline 2/docs/Apex_Metrics_Discussion.pptx
@@ -13,6 +13,7 @@
     <p:sldId id="261" r:id="rId12"/>
     <p:sldId id="262" r:id="rId13"/>
     <p:sldId id="263" r:id="rId14"/>
+    <p:sldId id="264" r:id="rId15"/>
   </p:sldIdLst>
   <p:sldSz cx="12191695" cy="6858000" type="screen4x3"/>
   <p:notesSz cx="6858000" cy="9144000"/>
@@ -3154,7 +3155,7 @@
         </p:nvSpPr>
         <p:spPr>
           <a:xfrm>
-            <a:off x="731520" y="1965960"/>
+            <a:off x="731520" y="2011680"/>
             <a:ext cx="10698480" cy="2926080"/>
           </a:xfrm>
           <a:prstGeom prst="rect">
@@ -3190,13 +3191,13 @@
               </a:spcAft>
             </a:pPr>
             <a:r>
-              <a:rPr sz="4000" b="1">
+              <a:rPr sz="3800" b="1">
                 <a:solidFill>
                   <a:srgbClr val="1A1F27"/>
                 </a:solidFill>
                 <a:latin typeface="Segoe UI"/>
               </a:rPr>
-              <a:t>What we have, what we need,</a:t>
+              <a:t>The Apex KPIs — what they are,</a:t>
             </a:r>
           </a:p>
           <a:p>
@@ -3206,13 +3207,13 @@
               </a:spcAft>
             </a:pPr>
             <a:r>
-              <a:rPr sz="4000" b="1">
+              <a:rPr sz="3800" b="1">
                 <a:solidFill>
                   <a:srgbClr val="1A1F27"/>
                 </a:solidFill>
                 <a:latin typeface="Segoe UI"/>
               </a:rPr>
-              <a:t>and what we need from you</a:t>
+              <a:t>and the golden data we need for them</a:t>
             </a:r>
           </a:p>
           <a:p>
@@ -3228,7 +3229,7 @@
                 </a:solidFill>
                 <a:latin typeface="Segoe UI"/>
               </a:rPr>
-              <a:t>A short, focused look at the Apex KPIs — for discussion with the business.</a:t>
+              <a:t>Enumerated per program, for discussion with the business.</a:t>
             </a:r>
           </a:p>
         </p:txBody>
@@ -3241,8 +3242,8 @@
         </p:nvSpPr>
         <p:spPr>
           <a:xfrm>
-            <a:off x="731520" y="5806440"/>
-            <a:ext cx="10698480" cy="731520"/>
+            <a:off x="731520" y="5852160"/>
+            <a:ext cx="10698480" cy="640080"/>
           </a:xfrm>
           <a:prstGeom prst="rect">
             <a:avLst/>
@@ -3267,7 +3268,7 @@
                 </a:solidFill>
                 <a:latin typeface="Segoe UI"/>
               </a:rPr>
-              <a:t>3 programs   ·   47 KPIs mapped   ·   8 Sep 2026</a:t>
+              <a:t>3 programs   ·   47 KPIs   ·   ~500 golden calls proposed   ·   8 Sep 2026</a:t>
             </a:r>
           </a:p>
         </p:txBody>
@@ -3349,8 +3350,8 @@
         </p:nvSpPr>
         <p:spPr>
           <a:xfrm>
-            <a:off x="640080" y="457200"/>
-            <a:ext cx="10972800" cy="1371600"/>
+            <a:off x="640080" y="384048"/>
+            <a:ext cx="11155680" cy="1280160"/>
           </a:xfrm>
           <a:prstGeom prst="rect">
             <a:avLst/>
@@ -3365,7 +3366,7 @@
           <a:p>
             <a:pPr>
               <a:spcAft>
-                <a:spcPts val="600"/>
+                <a:spcPts val="500"/>
               </a:spcAft>
             </a:pPr>
             <a:r>
@@ -3385,27 +3386,616 @@
               </a:spcAft>
             </a:pPr>
             <a:r>
-              <a:rPr sz="3000" b="1">
+              <a:rPr sz="2700" b="1">
                 <a:solidFill>
                   <a:srgbClr val="1A1F27"/>
                 </a:solidFill>
                 <a:latin typeface="Segoe UI"/>
               </a:rPr>
-              <a:t>What Apex measures today</a:t>
+              <a:t>What Apex measures, by the numbers</a:t>
             </a:r>
           </a:p>
         </p:txBody>
       </p:sp>
+      <p:graphicFrame>
+        <p:nvGraphicFramePr>
+          <p:cNvPr id="4" name="Table 3"/>
+          <p:cNvGraphicFramePr>
+            <a:graphicFrameLocks noGrp="1"/>
+          </p:cNvGraphicFramePr>
+          <p:nvPr/>
+        </p:nvGraphicFramePr>
+        <p:xfrm>
+          <a:off x="640080" y="1783080"/>
+          <a:ext cx="11521440" cy="2514600"/>
+        </p:xfrm>
+        <a:graphic>
+          <a:graphicData uri="http://schemas.openxmlformats.org/drawingml/2006/table">
+            <a:tbl>
+              <a:tblPr firstRow="1">
+                <a:tableStyleId>{5C22544A-7EE6-4342-B048-85BDC9FD1C3A}</a:tableStyleId>
+              </a:tblPr>
+              <a:tblGrid>
+                <a:gridCol w="2011680"/>
+                <a:gridCol w="4754880"/>
+                <a:gridCol w="1280160"/>
+                <a:gridCol w="1737360"/>
+                <a:gridCol w="1737360"/>
+              </a:tblGrid>
+              <a:tr h="502920">
+                <a:tc>
+                  <a:txBody>
+                    <a:bodyPr wrap="square"/>
+                    <a:lstStyle/>
+                    <a:p>
+                      <a:r>
+                        <a:rPr sz="1200" b="1">
+                          <a:solidFill>
+                            <a:srgbClr val="FFFFFF"/>
+                          </a:solidFill>
+                          <a:latin typeface="Segoe UI"/>
+                        </a:rPr>
+                        <a:t>Program</a:t>
+                      </a:r>
+                    </a:p>
+                  </a:txBody>
+                  <a:tcPr anchor="ctr" marL="82296" marR="54864" marT="18288" marB="18288">
+                    <a:solidFill>
+                      <a:srgbClr val="0E7C74"/>
+                    </a:solidFill>
+                  </a:tcPr>
+                </a:tc>
+                <a:tc>
+                  <a:txBody>
+                    <a:bodyPr wrap="square"/>
+                    <a:lstStyle/>
+                    <a:p>
+                      <a:r>
+                        <a:rPr sz="1200" b="1">
+                          <a:solidFill>
+                            <a:srgbClr val="FFFFFF"/>
+                          </a:solidFill>
+                          <a:latin typeface="Segoe UI"/>
+                        </a:rPr>
+                        <a:t>Lens</a:t>
+                      </a:r>
+                    </a:p>
+                  </a:txBody>
+                  <a:tcPr anchor="ctr" marL="82296" marR="54864" marT="18288" marB="18288">
+                    <a:solidFill>
+                      <a:srgbClr val="0E7C74"/>
+                    </a:solidFill>
+                  </a:tcPr>
+                </a:tc>
+                <a:tc>
+                  <a:txBody>
+                    <a:bodyPr wrap="square"/>
+                    <a:lstStyle/>
+                    <a:p>
+                      <a:r>
+                        <a:rPr sz="1200" b="1">
+                          <a:solidFill>
+                            <a:srgbClr val="FFFFFF"/>
+                          </a:solidFill>
+                          <a:latin typeface="Segoe UI"/>
+                        </a:rPr>
+                        <a:t>KPIs</a:t>
+                      </a:r>
+                    </a:p>
+                  </a:txBody>
+                  <a:tcPr anchor="ctr" marL="82296" marR="54864" marT="18288" marB="18288">
+                    <a:solidFill>
+                      <a:srgbClr val="0E7C74"/>
+                    </a:solidFill>
+                  </a:tcPr>
+                </a:tc>
+                <a:tc>
+                  <a:txBody>
+                    <a:bodyPr wrap="square"/>
+                    <a:lstStyle/>
+                    <a:p>
+                      <a:r>
+                        <a:rPr sz="1200" b="1">
+                          <a:solidFill>
+                            <a:srgbClr val="FFFFFF"/>
+                          </a:solidFill>
+                          <a:latin typeface="Segoe UI"/>
+                        </a:rPr>
+                        <a:t>Behaviours</a:t>
+                      </a:r>
+                    </a:p>
+                  </a:txBody>
+                  <a:tcPr anchor="ctr" marL="82296" marR="54864" marT="18288" marB="18288">
+                    <a:solidFill>
+                      <a:srgbClr val="0E7C74"/>
+                    </a:solidFill>
+                  </a:tcPr>
+                </a:tc>
+                <a:tc>
+                  <a:txBody>
+                    <a:bodyPr wrap="square"/>
+                    <a:lstStyle/>
+                    <a:p>
+                      <a:r>
+                        <a:rPr sz="1200" b="1">
+                          <a:solidFill>
+                            <a:srgbClr val="FFFFFF"/>
+                          </a:solidFill>
+                          <a:latin typeface="Segoe UI"/>
+                        </a:rPr>
+                        <a:t>Soft skills</a:t>
+                      </a:r>
+                    </a:p>
+                  </a:txBody>
+                  <a:tcPr anchor="ctr" marL="82296" marR="54864" marT="18288" marB="18288">
+                    <a:solidFill>
+                      <a:srgbClr val="0E7C74"/>
+                    </a:solidFill>
+                  </a:tcPr>
+                </a:tc>
+              </a:tr>
+              <a:tr h="502920">
+                <a:tc>
+                  <a:txBody>
+                    <a:bodyPr wrap="square"/>
+                    <a:lstStyle/>
+                    <a:p>
+                      <a:r>
+                        <a:rPr sz="1300" b="1">
+                          <a:solidFill>
+                            <a:srgbClr val="1A1F27"/>
+                          </a:solidFill>
+                          <a:latin typeface="Segoe UI"/>
+                        </a:rPr>
+                        <a:t>Telesales</a:t>
+                      </a:r>
+                    </a:p>
+                  </a:txBody>
+                  <a:tcPr anchor="ctr" marL="82296" marR="54864" marT="18288" marB="18288">
+                    <a:solidFill>
+                      <a:srgbClr val="FFFFFF"/>
+                    </a:solidFill>
+                  </a:tcPr>
+                </a:tc>
+                <a:tc>
+                  <a:txBody>
+                    <a:bodyPr wrap="square"/>
+                    <a:lstStyle/>
+                    <a:p>
+                      <a:r>
+                        <a:rPr sz="1300" b="0">
+                          <a:solidFill>
+                            <a:srgbClr val="535C6A"/>
+                          </a:solidFill>
+                          <a:latin typeface="Segoe UI"/>
+                        </a:rPr>
+                        <a:t>Sales</a:t>
+                      </a:r>
+                    </a:p>
+                  </a:txBody>
+                  <a:tcPr anchor="ctr" marL="82296" marR="54864" marT="18288" marB="18288">
+                    <a:solidFill>
+                      <a:srgbClr val="FFFFFF"/>
+                    </a:solidFill>
+                  </a:tcPr>
+                </a:tc>
+                <a:tc>
+                  <a:txBody>
+                    <a:bodyPr wrap="square"/>
+                    <a:lstStyle/>
+                    <a:p>
+                      <a:r>
+                        <a:rPr sz="1300" b="0">
+                          <a:solidFill>
+                            <a:srgbClr val="535C6A"/>
+                          </a:solidFill>
+                          <a:latin typeface="Segoe UI"/>
+                        </a:rPr>
+                        <a:t>12</a:t>
+                      </a:r>
+                    </a:p>
+                  </a:txBody>
+                  <a:tcPr anchor="ctr" marL="82296" marR="54864" marT="18288" marB="18288">
+                    <a:solidFill>
+                      <a:srgbClr val="FFFFFF"/>
+                    </a:solidFill>
+                  </a:tcPr>
+                </a:tc>
+                <a:tc>
+                  <a:txBody>
+                    <a:bodyPr wrap="square"/>
+                    <a:lstStyle/>
+                    <a:p>
+                      <a:r>
+                        <a:rPr sz="1300" b="0">
+                          <a:solidFill>
+                            <a:srgbClr val="535C6A"/>
+                          </a:solidFill>
+                          <a:latin typeface="Segoe UI"/>
+                        </a:rPr>
+                        <a:t>10</a:t>
+                      </a:r>
+                    </a:p>
+                  </a:txBody>
+                  <a:tcPr anchor="ctr" marL="82296" marR="54864" marT="18288" marB="18288">
+                    <a:solidFill>
+                      <a:srgbClr val="FFFFFF"/>
+                    </a:solidFill>
+                  </a:tcPr>
+                </a:tc>
+                <a:tc>
+                  <a:txBody>
+                    <a:bodyPr wrap="square"/>
+                    <a:lstStyle/>
+                    <a:p>
+                      <a:r>
+                        <a:rPr sz="1300" b="0">
+                          <a:solidFill>
+                            <a:srgbClr val="535C6A"/>
+                          </a:solidFill>
+                          <a:latin typeface="Segoe UI"/>
+                        </a:rPr>
+                        <a:t>6</a:t>
+                      </a:r>
+                    </a:p>
+                  </a:txBody>
+                  <a:tcPr anchor="ctr" marL="82296" marR="54864" marT="18288" marB="18288">
+                    <a:solidFill>
+                      <a:srgbClr val="FFFFFF"/>
+                    </a:solidFill>
+                  </a:tcPr>
+                </a:tc>
+              </a:tr>
+              <a:tr h="502920">
+                <a:tc>
+                  <a:txBody>
+                    <a:bodyPr wrap="square"/>
+                    <a:lstStyle/>
+                    <a:p>
+                      <a:r>
+                        <a:rPr sz="1300" b="1">
+                          <a:solidFill>
+                            <a:srgbClr val="1A1F27"/>
+                          </a:solidFill>
+                          <a:latin typeface="Segoe UI"/>
+                        </a:rPr>
+                        <a:t>WCC</a:t>
+                      </a:r>
+                    </a:p>
+                  </a:txBody>
+                  <a:tcPr anchor="ctr" marL="82296" marR="54864" marT="18288" marB="18288">
+                    <a:solidFill>
+                      <a:srgbClr val="F7F9F8"/>
+                    </a:solidFill>
+                  </a:tcPr>
+                </a:tc>
+                <a:tc>
+                  <a:txBody>
+                    <a:bodyPr wrap="square"/>
+                    <a:lstStyle/>
+                    <a:p>
+                      <a:r>
+                        <a:rPr sz="1300" b="0">
+                          <a:solidFill>
+                            <a:srgbClr val="535C6A"/>
+                          </a:solidFill>
+                          <a:latin typeface="Segoe UI"/>
+                        </a:rPr>
+                        <a:t>Care &amp; retention (LEARN/PROVIDE/CLOSE)</a:t>
+                      </a:r>
+                    </a:p>
+                  </a:txBody>
+                  <a:tcPr anchor="ctr" marL="82296" marR="54864" marT="18288" marB="18288">
+                    <a:solidFill>
+                      <a:srgbClr val="F7F9F8"/>
+                    </a:solidFill>
+                  </a:tcPr>
+                </a:tc>
+                <a:tc>
+                  <a:txBody>
+                    <a:bodyPr wrap="square"/>
+                    <a:lstStyle/>
+                    <a:p>
+                      <a:r>
+                        <a:rPr sz="1300" b="0">
+                          <a:solidFill>
+                            <a:srgbClr val="535C6A"/>
+                          </a:solidFill>
+                          <a:latin typeface="Segoe UI"/>
+                        </a:rPr>
+                        <a:t>11</a:t>
+                      </a:r>
+                    </a:p>
+                  </a:txBody>
+                  <a:tcPr anchor="ctr" marL="82296" marR="54864" marT="18288" marB="18288">
+                    <a:solidFill>
+                      <a:srgbClr val="F7F9F8"/>
+                    </a:solidFill>
+                  </a:tcPr>
+                </a:tc>
+                <a:tc>
+                  <a:txBody>
+                    <a:bodyPr wrap="square"/>
+                    <a:lstStyle/>
+                    <a:p>
+                      <a:r>
+                        <a:rPr sz="1300" b="0">
+                          <a:solidFill>
+                            <a:srgbClr val="535C6A"/>
+                          </a:solidFill>
+                          <a:latin typeface="Segoe UI"/>
+                        </a:rPr>
+                        <a:t>15</a:t>
+                      </a:r>
+                    </a:p>
+                  </a:txBody>
+                  <a:tcPr anchor="ctr" marL="82296" marR="54864" marT="18288" marB="18288">
+                    <a:solidFill>
+                      <a:srgbClr val="F7F9F8"/>
+                    </a:solidFill>
+                  </a:tcPr>
+                </a:tc>
+                <a:tc>
+                  <a:txBody>
+                    <a:bodyPr wrap="square"/>
+                    <a:lstStyle/>
+                    <a:p>
+                      <a:r>
+                        <a:rPr sz="1300" b="0">
+                          <a:solidFill>
+                            <a:srgbClr val="535C6A"/>
+                          </a:solidFill>
+                          <a:latin typeface="Segoe UI"/>
+                        </a:rPr>
+                        <a:t>6</a:t>
+                      </a:r>
+                    </a:p>
+                  </a:txBody>
+                  <a:tcPr anchor="ctr" marL="82296" marR="54864" marT="18288" marB="18288">
+                    <a:solidFill>
+                      <a:srgbClr val="F7F9F8"/>
+                    </a:solidFill>
+                  </a:tcPr>
+                </a:tc>
+              </a:tr>
+              <a:tr h="502920">
+                <a:tc>
+                  <a:txBody>
+                    <a:bodyPr wrap="square"/>
+                    <a:lstStyle/>
+                    <a:p>
+                      <a:r>
+                        <a:rPr sz="1300" b="1">
+                          <a:solidFill>
+                            <a:srgbClr val="1A1F27"/>
+                          </a:solidFill>
+                          <a:latin typeface="Segoe UI"/>
+                        </a:rPr>
+                        <a:t>PSO</a:t>
+                      </a:r>
+                    </a:p>
+                  </a:txBody>
+                  <a:tcPr anchor="ctr" marL="82296" marR="54864" marT="18288" marB="18288">
+                    <a:solidFill>
+                      <a:srgbClr val="FFFFFF"/>
+                    </a:solidFill>
+                  </a:tcPr>
+                </a:tc>
+                <a:tc>
+                  <a:txBody>
+                    <a:bodyPr wrap="square"/>
+                    <a:lstStyle/>
+                    <a:p>
+                      <a:r>
+                        <a:rPr sz="1300" b="0">
+                          <a:solidFill>
+                            <a:srgbClr val="535C6A"/>
+                          </a:solidFill>
+                          <a:latin typeface="Segoe UI"/>
+                        </a:rPr>
+                        <a:t>Care — VZ Mobile</a:t>
+                      </a:r>
+                    </a:p>
+                  </a:txBody>
+                  <a:tcPr anchor="ctr" marL="82296" marR="54864" marT="18288" marB="18288">
+                    <a:solidFill>
+                      <a:srgbClr val="FFFFFF"/>
+                    </a:solidFill>
+                  </a:tcPr>
+                </a:tc>
+                <a:tc>
+                  <a:txBody>
+                    <a:bodyPr wrap="square"/>
+                    <a:lstStyle/>
+                    <a:p>
+                      <a:r>
+                        <a:rPr sz="1300" b="0">
+                          <a:solidFill>
+                            <a:srgbClr val="535C6A"/>
+                          </a:solidFill>
+                          <a:latin typeface="Segoe UI"/>
+                        </a:rPr>
+                        <a:t>24</a:t>
+                      </a:r>
+                    </a:p>
+                  </a:txBody>
+                  <a:tcPr anchor="ctr" marL="82296" marR="54864" marT="18288" marB="18288">
+                    <a:solidFill>
+                      <a:srgbClr val="FFFFFF"/>
+                    </a:solidFill>
+                  </a:tcPr>
+                </a:tc>
+                <a:tc>
+                  <a:txBody>
+                    <a:bodyPr wrap="square"/>
+                    <a:lstStyle/>
+                    <a:p>
+                      <a:r>
+                        <a:rPr sz="1300" b="0">
+                          <a:solidFill>
+                            <a:srgbClr val="535C6A"/>
+                          </a:solidFill>
+                          <a:latin typeface="Segoe UI"/>
+                        </a:rPr>
+                        <a:t>13</a:t>
+                      </a:r>
+                    </a:p>
+                  </a:txBody>
+                  <a:tcPr anchor="ctr" marL="82296" marR="54864" marT="18288" marB="18288">
+                    <a:solidFill>
+                      <a:srgbClr val="FFFFFF"/>
+                    </a:solidFill>
+                  </a:tcPr>
+                </a:tc>
+                <a:tc>
+                  <a:txBody>
+                    <a:bodyPr wrap="square"/>
+                    <a:lstStyle/>
+                    <a:p>
+                      <a:r>
+                        <a:rPr sz="1300" b="0">
+                          <a:solidFill>
+                            <a:srgbClr val="535C6A"/>
+                          </a:solidFill>
+                          <a:latin typeface="Segoe UI"/>
+                        </a:rPr>
+                        <a:t>6</a:t>
+                      </a:r>
+                    </a:p>
+                  </a:txBody>
+                  <a:tcPr anchor="ctr" marL="82296" marR="54864" marT="18288" marB="18288">
+                    <a:solidFill>
+                      <a:srgbClr val="FFFFFF"/>
+                    </a:solidFill>
+                  </a:tcPr>
+                </a:tc>
+              </a:tr>
+              <a:tr h="502920">
+                <a:tc>
+                  <a:txBody>
+                    <a:bodyPr wrap="square"/>
+                    <a:lstStyle/>
+                    <a:p>
+                      <a:r>
+                        <a:rPr sz="1300" b="1">
+                          <a:solidFill>
+                            <a:srgbClr val="1A1F27"/>
+                          </a:solidFill>
+                          <a:latin typeface="Segoe UI"/>
+                        </a:rPr>
+                        <a:t>Total</a:t>
+                      </a:r>
+                    </a:p>
+                  </a:txBody>
+                  <a:tcPr anchor="ctr" marL="82296" marR="54864" marT="18288" marB="18288">
+                    <a:solidFill>
+                      <a:srgbClr val="F7F9F8"/>
+                    </a:solidFill>
+                  </a:tcPr>
+                </a:tc>
+                <a:tc>
+                  <a:txBody>
+                    <a:bodyPr wrap="square"/>
+                    <a:lstStyle/>
+                    <a:p>
+                      <a:r>
+                        <a:rPr sz="1300" b="0">
+                          <a:solidFill>
+                            <a:srgbClr val="535C6A"/>
+                          </a:solidFill>
+                          <a:latin typeface="Segoe UI"/>
+                        </a:rPr>
+                        <a:t>3 lines of business</a:t>
+                      </a:r>
+                    </a:p>
+                  </a:txBody>
+                  <a:tcPr anchor="ctr" marL="82296" marR="54864" marT="18288" marB="18288">
+                    <a:solidFill>
+                      <a:srgbClr val="F7F9F8"/>
+                    </a:solidFill>
+                  </a:tcPr>
+                </a:tc>
+                <a:tc>
+                  <a:txBody>
+                    <a:bodyPr wrap="square"/>
+                    <a:lstStyle/>
+                    <a:p>
+                      <a:r>
+                        <a:rPr sz="1300" b="0">
+                          <a:solidFill>
+                            <a:srgbClr val="535C6A"/>
+                          </a:solidFill>
+                          <a:latin typeface="Segoe UI"/>
+                        </a:rPr>
+                        <a:t>47</a:t>
+                      </a:r>
+                    </a:p>
+                  </a:txBody>
+                  <a:tcPr anchor="ctr" marL="82296" marR="54864" marT="18288" marB="18288">
+                    <a:solidFill>
+                      <a:srgbClr val="F7F9F8"/>
+                    </a:solidFill>
+                  </a:tcPr>
+                </a:tc>
+                <a:tc>
+                  <a:txBody>
+                    <a:bodyPr wrap="square"/>
+                    <a:lstStyle/>
+                    <a:p>
+                      <a:r>
+                        <a:rPr sz="1300" b="0">
+                          <a:solidFill>
+                            <a:srgbClr val="535C6A"/>
+                          </a:solidFill>
+                          <a:latin typeface="Segoe UI"/>
+                        </a:rPr>
+                        <a:t>38</a:t>
+                      </a:r>
+                    </a:p>
+                  </a:txBody>
+                  <a:tcPr anchor="ctr" marL="82296" marR="54864" marT="18288" marB="18288">
+                    <a:solidFill>
+                      <a:srgbClr val="F7F9F8"/>
+                    </a:solidFill>
+                  </a:tcPr>
+                </a:tc>
+                <a:tc>
+                  <a:txBody>
+                    <a:bodyPr wrap="square"/>
+                    <a:lstStyle/>
+                    <a:p>
+                      <a:r>
+                        <a:rPr sz="1300" b="0">
+                          <a:solidFill>
+                            <a:srgbClr val="535C6A"/>
+                          </a:solidFill>
+                          <a:latin typeface="Segoe UI"/>
+                        </a:rPr>
+                        <a:t>6 shared</a:t>
+                      </a:r>
+                    </a:p>
+                  </a:txBody>
+                  <a:tcPr anchor="ctr" marL="82296" marR="54864" marT="18288" marB="18288">
+                    <a:solidFill>
+                      <a:srgbClr val="F7F9F8"/>
+                    </a:solidFill>
+                  </a:tcPr>
+                </a:tc>
+              </a:tr>
+            </a:tbl>
+          </a:graphicData>
+        </a:graphic>
+      </p:graphicFrame>
       <p:sp>
         <p:nvSpPr>
-          <p:cNvPr id="4" name="TextBox 3"/>
+          <p:cNvPr id="5" name="TextBox 4"/>
           <p:cNvSpPr txBox="1"/>
           <p:nvPr/>
         </p:nvSpPr>
         <p:spPr>
           <a:xfrm>
-            <a:off x="685800" y="1965960"/>
-            <a:ext cx="5303520" cy="4206240"/>
+            <a:off x="658368" y="4846320"/>
+            <a:ext cx="10881360" cy="1280160"/>
           </a:xfrm>
           <a:prstGeom prst="rect">
             <a:avLst/>
@@ -3420,127 +4010,31 @@
           <a:p>
             <a:pPr>
               <a:spcAft>
-                <a:spcPts val="1200"/>
+                <a:spcPts val="600"/>
               </a:spcAft>
             </a:pPr>
             <a:r>
-              <a:rPr sz="1700" b="0">
-                <a:solidFill>
-                  <a:srgbClr val="0E7C74"/>
-                </a:solidFill>
-                <a:latin typeface="Segoe UI"/>
-              </a:rPr>
-              <a:t>Telesales  —  sales lens</a:t>
-            </a:r>
-          </a:p>
-          <a:p>
-            <a:pPr>
-              <a:spcAft>
-                <a:spcPts val="1200"/>
-              </a:spcAft>
-            </a:pPr>
-            <a:r>
-              <a:rPr sz="1700" b="0">
+              <a:rPr sz="1400" b="0">
                 <a:solidFill>
                   <a:srgbClr val="535C6A"/>
                 </a:solidFill>
                 <a:latin typeface="Segoe UI"/>
               </a:rPr>
-              <a:t>12 KPIs: new-line pitches, upgrades, saves,</a:t>
-            </a:r>
-          </a:p>
-          <a:p>
-            <a:pPr>
-              <a:spcAft>
-                <a:spcPts val="1200"/>
-              </a:spcAft>
-            </a:pPr>
-            <a:r>
-              <a:rPr sz="1700" b="0">
-                <a:solidFill>
-                  <a:srgbClr val="535C6A"/>
-                </a:solidFill>
-                <a:latin typeface="Segoe UI"/>
-              </a:rPr>
-              <a:t>mobile protection, escalations, experience</a:t>
-            </a:r>
-          </a:p>
-          <a:p>
-            <a:pPr>
-              <a:spcAft>
-                <a:spcPts val="1200"/>
-              </a:spcAft>
-            </a:pPr>
-            <a:r>
-              <a:rPr sz="1700" b="0">
-                <a:solidFill>
-                  <a:srgbClr val="1A1F27"/>
-                </a:solidFill>
-                <a:latin typeface="Segoe UI"/>
-              </a:rPr>
-              <a:t/>
-            </a:r>
-          </a:p>
-          <a:p>
-            <a:pPr>
-              <a:spcAft>
-                <a:spcPts val="1200"/>
-              </a:spcAft>
-            </a:pPr>
-            <a:r>
-              <a:rPr sz="1700" b="0">
-                <a:solidFill>
-                  <a:srgbClr val="0E7C74"/>
-                </a:solidFill>
-                <a:latin typeface="Segoe UI"/>
-              </a:rPr>
-              <a:t>WCC  —  care &amp; retention lens</a:t>
-            </a:r>
-          </a:p>
-          <a:p>
-            <a:pPr>
-              <a:spcAft>
-                <a:spcPts val="1200"/>
-              </a:spcAft>
-            </a:pPr>
-            <a:r>
-              <a:rPr sz="1700" b="0">
-                <a:solidFill>
-                  <a:srgbClr val="535C6A"/>
-                </a:solidFill>
-                <a:latin typeface="Segoe UI"/>
-              </a:rPr>
-              <a:t>11 KPIs: resolution, saves, right-of-sell,</a:t>
-            </a:r>
-          </a:p>
-          <a:p>
-            <a:pPr>
-              <a:spcAft>
-                <a:spcPts val="1200"/>
-              </a:spcAft>
-            </a:pPr>
-            <a:r>
-              <a:rPr sz="1700" b="0">
-                <a:solidFill>
-                  <a:srgbClr val="535C6A"/>
-                </a:solidFill>
-                <a:latin typeface="Segoe UI"/>
-              </a:rPr>
-              <a:t>across LEARN / PROVIDE / CLOSE phases</a:t>
+              <a:t>KPIs = counts or rates from per-call judgments.  Behaviours &amp; soft skills = 0–1 averages.</a:t>
             </a:r>
           </a:p>
         </p:txBody>
       </p:sp>
       <p:sp>
         <p:nvSpPr>
-          <p:cNvPr id="5" name="TextBox 4"/>
+          <p:cNvPr id="6" name="TextBox 5"/>
           <p:cNvSpPr txBox="1"/>
           <p:nvPr/>
         </p:nvSpPr>
         <p:spPr>
           <a:xfrm>
-            <a:off x="6355080" y="1965960"/>
-            <a:ext cx="5120640" cy="4206240"/>
+            <a:off x="658368" y="5257800"/>
+            <a:ext cx="10881360" cy="914400"/>
           </a:xfrm>
           <a:prstGeom prst="rect">
             <a:avLst/>
@@ -3555,113 +4049,17 @@
           <a:p>
             <a:pPr>
               <a:spcAft>
-                <a:spcPts val="1200"/>
+                <a:spcPts val="0"/>
               </a:spcAft>
             </a:pPr>
             <a:r>
-              <a:rPr sz="1700" b="0">
+              <a:rPr sz="1400" b="0">
                 <a:solidFill>
-                  <a:srgbClr val="0E7C74"/>
+                  <a:srgbClr val="A96E12"/>
                 </a:solidFill>
                 <a:latin typeface="Segoe UI"/>
               </a:rPr>
-              <a:t>PSO  —  VZ Mobile care lens (most detailed)</a:t>
-            </a:r>
-          </a:p>
-          <a:p>
-            <a:pPr>
-              <a:spcAft>
-                <a:spcPts val="1200"/>
-              </a:spcAft>
-            </a:pPr>
-            <a:r>
-              <a:rPr sz="1700" b="0">
-                <a:solidFill>
-                  <a:srgbClr val="535C6A"/>
-                </a:solidFill>
-                <a:latin typeface="Segoe UI"/>
-              </a:rPr>
-              <a:t>24 KPIs: CSAT, FCR, quality, efficiency,</a:t>
-            </a:r>
-          </a:p>
-          <a:p>
-            <a:pPr>
-              <a:spcAft>
-                <a:spcPts val="1200"/>
-              </a:spcAft>
-            </a:pPr>
-            <a:r>
-              <a:rPr sz="1700" b="0">
-                <a:solidFill>
-                  <a:srgbClr val="535C6A"/>
-                </a:solidFill>
-                <a:latin typeface="Segoe UI"/>
-              </a:rPr>
-              <a:t>repeat-contact risk</a:t>
-            </a:r>
-          </a:p>
-          <a:p>
-            <a:pPr>
-              <a:spcAft>
-                <a:spcPts val="1200"/>
-              </a:spcAft>
-            </a:pPr>
-            <a:r>
-              <a:rPr sz="1700" b="0">
-                <a:solidFill>
-                  <a:srgbClr val="1A1F27"/>
-                </a:solidFill>
-                <a:latin typeface="Segoe UI"/>
-              </a:rPr>
-              <a:t/>
-            </a:r>
-          </a:p>
-          <a:p>
-            <a:pPr>
-              <a:spcAft>
-                <a:spcPts val="1200"/>
-              </a:spcAft>
-            </a:pPr>
-            <a:r>
-              <a:rPr sz="1700" b="0">
-                <a:solidFill>
-                  <a:srgbClr val="0E7C74"/>
-                </a:solidFill>
-                <a:latin typeface="Segoe UI"/>
-              </a:rPr>
-              <a:t>Plus, for every program:</a:t>
-            </a:r>
-          </a:p>
-          <a:p>
-            <a:pPr>
-              <a:spcAft>
-                <a:spcPts val="1200"/>
-              </a:spcAft>
-            </a:pPr>
-            <a:r>
-              <a:rPr sz="1700" b="0">
-                <a:solidFill>
-                  <a:srgbClr val="535C6A"/>
-                </a:solidFill>
-                <a:latin typeface="Segoe UI"/>
-              </a:rPr>
-              <a:t>behaviour scores, soft skills, and operational</a:t>
-            </a:r>
-          </a:p>
-          <a:p>
-            <a:pPr>
-              <a:spcAft>
-                <a:spcPts val="1200"/>
-              </a:spcAft>
-            </a:pPr>
-            <a:r>
-              <a:rPr sz="1700" b="0">
-                <a:solidFill>
-                  <a:srgbClr val="535C6A"/>
-                </a:solidFill>
-                <a:latin typeface="Segoe UI"/>
-              </a:rPr>
-              <a:t>metrics (AHT / VXS / FCR) from Verizon data</a:t>
+              <a:t>Separately: operational metrics (AHT · VXS · FCR · resolve/disconnect) come from Verizon data, not the model.</a:t>
             </a:r>
           </a:p>
         </p:txBody>
@@ -3743,8 +4141,8 @@
         </p:nvSpPr>
         <p:spPr>
           <a:xfrm>
-            <a:off x="640080" y="457200"/>
-            <a:ext cx="10972800" cy="1371600"/>
+            <a:off x="640080" y="384048"/>
+            <a:ext cx="11155680" cy="1280160"/>
           </a:xfrm>
           <a:prstGeom prst="rect">
             <a:avLst/>
@@ -3759,7 +4157,7 @@
           <a:p>
             <a:pPr>
               <a:spcAft>
-                <a:spcPts val="600"/>
+                <a:spcPts val="500"/>
               </a:spcAft>
             </a:pPr>
             <a:r>
@@ -3769,7 +4167,7 @@
                 </a:solidFill>
                 <a:latin typeface="Segoe UI"/>
               </a:rPr>
-              <a:t>HOW IT WORKS</a:t>
+              <a:t>KPIS · TELESALES (12)</a:t>
             </a:r>
           </a:p>
           <a:p>
@@ -3779,152 +4177,928 @@
               </a:spcAft>
             </a:pPr>
             <a:r>
-              <a:rPr sz="3000" b="1">
+              <a:rPr sz="2700" b="1">
                 <a:solidFill>
                   <a:srgbClr val="1A1F27"/>
                 </a:solidFill>
                 <a:latin typeface="Segoe UI"/>
               </a:rPr>
-              <a:t>From one call to a KPI</a:t>
+              <a:t>Sales performance</a:t>
             </a:r>
           </a:p>
         </p:txBody>
       </p:sp>
-      <p:sp>
-        <p:nvSpPr>
-          <p:cNvPr id="4" name="TextBox 3"/>
-          <p:cNvSpPr txBox="1"/>
+      <p:graphicFrame>
+        <p:nvGraphicFramePr>
+          <p:cNvPr id="4" name="Table 3"/>
+          <p:cNvGraphicFramePr>
+            <a:graphicFrameLocks noGrp="1"/>
+          </p:cNvGraphicFramePr>
           <p:nvPr/>
-        </p:nvSpPr>
-        <p:spPr>
-          <a:xfrm>
-            <a:off x="685800" y="1965960"/>
-            <a:ext cx="10881360" cy="4297680"/>
-          </a:xfrm>
-          <a:prstGeom prst="rect">
-            <a:avLst/>
-          </a:prstGeom>
-          <a:noFill/>
-        </p:spPr>
-        <p:txBody>
-          <a:bodyPr wrap="square">
-            <a:spAutoFit/>
-          </a:bodyPr>
-          <a:lstStyle/>
-          <a:p>
-            <a:pPr>
-              <a:spcAft>
-                <a:spcPts val="1300"/>
-              </a:spcAft>
-            </a:pPr>
-            <a:r>
-              <a:rPr sz="1700" b="0">
-                <a:solidFill>
-                  <a:srgbClr val="1A1F27"/>
-                </a:solidFill>
-                <a:latin typeface="Segoe UI"/>
-              </a:rPr>
-              <a:t>Call transcript   →   per-call judgment   →   added up per agent   →   KPI</a:t>
-            </a:r>
-          </a:p>
-          <a:p>
-            <a:pPr>
-              <a:spcAft>
-                <a:spcPts val="1300"/>
-              </a:spcAft>
-            </a:pPr>
-            <a:r>
-              <a:rPr sz="1700" b="0">
-                <a:solidFill>
-                  <a:srgbClr val="1A1F27"/>
-                </a:solidFill>
-                <a:latin typeface="Segoe UI"/>
-              </a:rPr>
-              <a:t/>
-            </a:r>
-          </a:p>
-          <a:p>
-            <a:pPr>
-              <a:spcAft>
-                <a:spcPts val="1300"/>
-              </a:spcAft>
-            </a:pPr>
-            <a:r>
-              <a:rPr sz="1700" b="0">
-                <a:solidFill>
-                  <a:srgbClr val="535C6A"/>
-                </a:solidFill>
-                <a:latin typeface="Segoe UI"/>
-              </a:rPr>
-              <a:t>The model judges each call (true/false, a rating, a score).</a:t>
-            </a:r>
-          </a:p>
-          <a:p>
-            <a:pPr>
-              <a:spcAft>
-                <a:spcPts val="1300"/>
-              </a:spcAft>
-            </a:pPr>
-            <a:r>
-              <a:rPr sz="1700" b="0">
-                <a:solidFill>
-                  <a:srgbClr val="535C6A"/>
-                </a:solidFill>
-                <a:latin typeface="Segoe UI"/>
-              </a:rPr>
-              <a:t>KPIs are counts or rates computed from those judgments.</a:t>
-            </a:r>
-          </a:p>
-          <a:p>
-            <a:pPr>
-              <a:spcAft>
-                <a:spcPts val="1300"/>
-              </a:spcAft>
-            </a:pPr>
-            <a:r>
-              <a:rPr sz="1700" b="0">
-                <a:solidFill>
-                  <a:srgbClr val="535C6A"/>
-                </a:solidFill>
-                <a:latin typeface="Segoe UI"/>
-              </a:rPr>
-              <a:t>Every judgment is backed by the exact call segments that justify it — auditable, not a black box.</a:t>
-            </a:r>
-          </a:p>
-          <a:p>
-            <a:pPr>
-              <a:spcAft>
-                <a:spcPts val="1300"/>
-              </a:spcAft>
-            </a:pPr>
-            <a:r>
-              <a:rPr sz="1700" b="0">
-                <a:solidFill>
-                  <a:srgbClr val="1A1F27"/>
-                </a:solidFill>
-                <a:latin typeface="Segoe UI"/>
-              </a:rPr>
-              <a:t/>
-            </a:r>
-          </a:p>
-          <a:p>
-            <a:pPr>
-              <a:spcAft>
-                <a:spcPts val="1300"/>
-              </a:spcAft>
-            </a:pPr>
-            <a:r>
-              <a:rPr sz="1700" b="0">
-                <a:solidFill>
-                  <a:srgbClr val="A96E12"/>
-                </a:solidFill>
-                <a:latin typeface="Segoe UI"/>
-              </a:rPr>
-              <a:t>Operational metrics (AHT, VXS, resolution rate) come from Verizon's warehouse — not the model.</a:t>
-            </a:r>
-          </a:p>
-        </p:txBody>
-      </p:sp>
+        </p:nvGraphicFramePr>
+        <p:xfrm>
+          <a:off x="640080" y="1783080"/>
+          <a:ext cx="10927080" cy="4279392"/>
+        </p:xfrm>
+        <a:graphic>
+          <a:graphicData uri="http://schemas.openxmlformats.org/drawingml/2006/table">
+            <a:tbl>
+              <a:tblPr firstRow="1">
+                <a:tableStyleId>{5C22544A-7EE6-4342-B048-85BDC9FD1C3A}</a:tableStyleId>
+              </a:tblPr>
+              <a:tblGrid>
+                <a:gridCol w="3200400"/>
+                <a:gridCol w="6446520"/>
+                <a:gridCol w="1280160"/>
+              </a:tblGrid>
+              <a:tr h="329184">
+                <a:tc>
+                  <a:txBody>
+                    <a:bodyPr wrap="square"/>
+                    <a:lstStyle/>
+                    <a:p>
+                      <a:r>
+                        <a:rPr sz="1100" b="1">
+                          <a:solidFill>
+                            <a:srgbClr val="FFFFFF"/>
+                          </a:solidFill>
+                          <a:latin typeface="Segoe UI"/>
+                        </a:rPr>
+                        <a:t>KPI</a:t>
+                      </a:r>
+                    </a:p>
+                  </a:txBody>
+                  <a:tcPr anchor="ctr" marL="82296" marR="54864" marT="18288" marB="18288">
+                    <a:solidFill>
+                      <a:srgbClr val="0E7C74"/>
+                    </a:solidFill>
+                  </a:tcPr>
+                </a:tc>
+                <a:tc>
+                  <a:txBody>
+                    <a:bodyPr wrap="square"/>
+                    <a:lstStyle/>
+                    <a:p>
+                      <a:r>
+                        <a:rPr sz="1100" b="1">
+                          <a:solidFill>
+                            <a:srgbClr val="FFFFFF"/>
+                          </a:solidFill>
+                          <a:latin typeface="Segoe UI"/>
+                        </a:rPr>
+                        <a:t>What it measures</a:t>
+                      </a:r>
+                    </a:p>
+                  </a:txBody>
+                  <a:tcPr anchor="ctr" marL="82296" marR="54864" marT="18288" marB="18288">
+                    <a:solidFill>
+                      <a:srgbClr val="0E7C74"/>
+                    </a:solidFill>
+                  </a:tcPr>
+                </a:tc>
+                <a:tc>
+                  <a:txBody>
+                    <a:bodyPr wrap="square"/>
+                    <a:lstStyle/>
+                    <a:p>
+                      <a:r>
+                        <a:rPr sz="1100" b="1">
+                          <a:solidFill>
+                            <a:srgbClr val="FFFFFF"/>
+                          </a:solidFill>
+                          <a:latin typeface="Segoe UI"/>
+                        </a:rPr>
+                        <a:t>Unit</a:t>
+                      </a:r>
+                    </a:p>
+                  </a:txBody>
+                  <a:tcPr anchor="ctr" marL="82296" marR="54864" marT="18288" marB="18288">
+                    <a:solidFill>
+                      <a:srgbClr val="0E7C74"/>
+                    </a:solidFill>
+                  </a:tcPr>
+                </a:tc>
+              </a:tr>
+              <a:tr h="329184">
+                <a:tc>
+                  <a:txBody>
+                    <a:bodyPr wrap="square"/>
+                    <a:lstStyle/>
+                    <a:p>
+                      <a:r>
+                        <a:rPr sz="1100" b="1">
+                          <a:solidFill>
+                            <a:srgbClr val="1A1F27"/>
+                          </a:solidFill>
+                          <a:latin typeface="Segoe UI"/>
+                        </a:rPr>
+                        <a:t>new_line_pitches</a:t>
+                      </a:r>
+                    </a:p>
+                  </a:txBody>
+                  <a:tcPr anchor="ctr" marL="82296" marR="54864" marT="18288" marB="18288">
+                    <a:solidFill>
+                      <a:srgbClr val="FFFFFF"/>
+                    </a:solidFill>
+                  </a:tcPr>
+                </a:tc>
+                <a:tc>
+                  <a:txBody>
+                    <a:bodyPr wrap="square"/>
+                    <a:lstStyle/>
+                    <a:p>
+                      <a:r>
+                        <a:rPr sz="1100" b="0">
+                          <a:solidFill>
+                            <a:srgbClr val="535C6A"/>
+                          </a:solidFill>
+                          <a:latin typeface="Segoe UI"/>
+                        </a:rPr>
+                        <a:t>New-line pitches where an opportunity existed</a:t>
+                      </a:r>
+                    </a:p>
+                  </a:txBody>
+                  <a:tcPr anchor="ctr" marL="82296" marR="54864" marT="18288" marB="18288">
+                    <a:solidFill>
+                      <a:srgbClr val="FFFFFF"/>
+                    </a:solidFill>
+                  </a:tcPr>
+                </a:tc>
+                <a:tc>
+                  <a:txBody>
+                    <a:bodyPr wrap="square"/>
+                    <a:lstStyle/>
+                    <a:p>
+                      <a:r>
+                        <a:rPr sz="1100" b="0">
+                          <a:solidFill>
+                            <a:srgbClr val="535C6A"/>
+                          </a:solidFill>
+                          <a:latin typeface="Segoe UI"/>
+                        </a:rPr>
+                        <a:t>count</a:t>
+                      </a:r>
+                    </a:p>
+                  </a:txBody>
+                  <a:tcPr anchor="ctr" marL="82296" marR="54864" marT="18288" marB="18288">
+                    <a:solidFill>
+                      <a:srgbClr val="FFFFFF"/>
+                    </a:solidFill>
+                  </a:tcPr>
+                </a:tc>
+              </a:tr>
+              <a:tr h="329184">
+                <a:tc>
+                  <a:txBody>
+                    <a:bodyPr wrap="square"/>
+                    <a:lstStyle/>
+                    <a:p>
+                      <a:r>
+                        <a:rPr sz="1100" b="1">
+                          <a:solidFill>
+                            <a:srgbClr val="1A1F27"/>
+                          </a:solidFill>
+                          <a:latin typeface="Segoe UI"/>
+                        </a:rPr>
+                        <a:t>new_line_opportunity_exists</a:t>
+                      </a:r>
+                    </a:p>
+                  </a:txBody>
+                  <a:tcPr anchor="ctr" marL="82296" marR="54864" marT="18288" marB="18288">
+                    <a:solidFill>
+                      <a:srgbClr val="F7F9F8"/>
+                    </a:solidFill>
+                  </a:tcPr>
+                </a:tc>
+                <a:tc>
+                  <a:txBody>
+                    <a:bodyPr wrap="square"/>
+                    <a:lstStyle/>
+                    <a:p>
+                      <a:r>
+                        <a:rPr sz="1100" b="0">
+                          <a:solidFill>
+                            <a:srgbClr val="535C6A"/>
+                          </a:solidFill>
+                          <a:latin typeface="Segoe UI"/>
+                        </a:rPr>
+                        <a:t>New-line opportunities present</a:t>
+                      </a:r>
+                    </a:p>
+                  </a:txBody>
+                  <a:tcPr anchor="ctr" marL="82296" marR="54864" marT="18288" marB="18288">
+                    <a:solidFill>
+                      <a:srgbClr val="F7F9F8"/>
+                    </a:solidFill>
+                  </a:tcPr>
+                </a:tc>
+                <a:tc>
+                  <a:txBody>
+                    <a:bodyPr wrap="square"/>
+                    <a:lstStyle/>
+                    <a:p>
+                      <a:r>
+                        <a:rPr sz="1100" b="0">
+                          <a:solidFill>
+                            <a:srgbClr val="535C6A"/>
+                          </a:solidFill>
+                          <a:latin typeface="Segoe UI"/>
+                        </a:rPr>
+                        <a:t>count</a:t>
+                      </a:r>
+                    </a:p>
+                  </a:txBody>
+                  <a:tcPr anchor="ctr" marL="82296" marR="54864" marT="18288" marB="18288">
+                    <a:solidFill>
+                      <a:srgbClr val="F7F9F8"/>
+                    </a:solidFill>
+                  </a:tcPr>
+                </a:tc>
+              </a:tr>
+              <a:tr h="329184">
+                <a:tc>
+                  <a:txBody>
+                    <a:bodyPr wrap="square"/>
+                    <a:lstStyle/>
+                    <a:p>
+                      <a:r>
+                        <a:rPr sz="1100" b="1">
+                          <a:solidFill>
+                            <a:srgbClr val="1A1F27"/>
+                          </a:solidFill>
+                          <a:latin typeface="Segoe UI"/>
+                        </a:rPr>
+                        <a:t>new_line_opportunity_missed</a:t>
+                      </a:r>
+                    </a:p>
+                  </a:txBody>
+                  <a:tcPr anchor="ctr" marL="82296" marR="54864" marT="18288" marB="18288">
+                    <a:solidFill>
+                      <a:srgbClr val="FFFFFF"/>
+                    </a:solidFill>
+                  </a:tcPr>
+                </a:tc>
+                <a:tc>
+                  <a:txBody>
+                    <a:bodyPr wrap="square"/>
+                    <a:lstStyle/>
+                    <a:p>
+                      <a:r>
+                        <a:rPr sz="1100" b="0">
+                          <a:solidFill>
+                            <a:srgbClr val="535C6A"/>
+                          </a:solidFill>
+                          <a:latin typeface="Segoe UI"/>
+                        </a:rPr>
+                        <a:t>Share of new-line opportunities not pitched</a:t>
+                      </a:r>
+                    </a:p>
+                  </a:txBody>
+                  <a:tcPr anchor="ctr" marL="82296" marR="54864" marT="18288" marB="18288">
+                    <a:solidFill>
+                      <a:srgbClr val="FFFFFF"/>
+                    </a:solidFill>
+                  </a:tcPr>
+                </a:tc>
+                <a:tc>
+                  <a:txBody>
+                    <a:bodyPr wrap="square"/>
+                    <a:lstStyle/>
+                    <a:p>
+                      <a:r>
+                        <a:rPr sz="1100" b="0">
+                          <a:solidFill>
+                            <a:srgbClr val="535C6A"/>
+                          </a:solidFill>
+                          <a:latin typeface="Segoe UI"/>
+                        </a:rPr>
+                        <a:t>rate</a:t>
+                      </a:r>
+                    </a:p>
+                  </a:txBody>
+                  <a:tcPr anchor="ctr" marL="82296" marR="54864" marT="18288" marB="18288">
+                    <a:solidFill>
+                      <a:srgbClr val="FFFFFF"/>
+                    </a:solidFill>
+                  </a:tcPr>
+                </a:tc>
+              </a:tr>
+              <a:tr h="329184">
+                <a:tc>
+                  <a:txBody>
+                    <a:bodyPr wrap="square"/>
+                    <a:lstStyle/>
+                    <a:p>
+                      <a:r>
+                        <a:rPr sz="1100" b="1">
+                          <a:solidFill>
+                            <a:srgbClr val="1A1F27"/>
+                          </a:solidFill>
+                          <a:latin typeface="Segoe UI"/>
+                        </a:rPr>
+                        <a:t>upgrade_attempts</a:t>
+                      </a:r>
+                    </a:p>
+                  </a:txBody>
+                  <a:tcPr anchor="ctr" marL="82296" marR="54864" marT="18288" marB="18288">
+                    <a:solidFill>
+                      <a:srgbClr val="F7F9F8"/>
+                    </a:solidFill>
+                  </a:tcPr>
+                </a:tc>
+                <a:tc>
+                  <a:txBody>
+                    <a:bodyPr wrap="square"/>
+                    <a:lstStyle/>
+                    <a:p>
+                      <a:r>
+                        <a:rPr sz="1100" b="0">
+                          <a:solidFill>
+                            <a:srgbClr val="535C6A"/>
+                          </a:solidFill>
+                          <a:latin typeface="Segoe UI"/>
+                        </a:rPr>
+                        <a:t>Upgrade pitches where an opportunity existed</a:t>
+                      </a:r>
+                    </a:p>
+                  </a:txBody>
+                  <a:tcPr anchor="ctr" marL="82296" marR="54864" marT="18288" marB="18288">
+                    <a:solidFill>
+                      <a:srgbClr val="F7F9F8"/>
+                    </a:solidFill>
+                  </a:tcPr>
+                </a:tc>
+                <a:tc>
+                  <a:txBody>
+                    <a:bodyPr wrap="square"/>
+                    <a:lstStyle/>
+                    <a:p>
+                      <a:r>
+                        <a:rPr sz="1100" b="0">
+                          <a:solidFill>
+                            <a:srgbClr val="535C6A"/>
+                          </a:solidFill>
+                          <a:latin typeface="Segoe UI"/>
+                        </a:rPr>
+                        <a:t>count</a:t>
+                      </a:r>
+                    </a:p>
+                  </a:txBody>
+                  <a:tcPr anchor="ctr" marL="82296" marR="54864" marT="18288" marB="18288">
+                    <a:solidFill>
+                      <a:srgbClr val="F7F9F8"/>
+                    </a:solidFill>
+                  </a:tcPr>
+                </a:tc>
+              </a:tr>
+              <a:tr h="329184">
+                <a:tc>
+                  <a:txBody>
+                    <a:bodyPr wrap="square"/>
+                    <a:lstStyle/>
+                    <a:p>
+                      <a:r>
+                        <a:rPr sz="1100" b="1">
+                          <a:solidFill>
+                            <a:srgbClr val="1A1F27"/>
+                          </a:solidFill>
+                          <a:latin typeface="Segoe UI"/>
+                        </a:rPr>
+                        <a:t>upgrade_opportunity_exists</a:t>
+                      </a:r>
+                    </a:p>
+                  </a:txBody>
+                  <a:tcPr anchor="ctr" marL="82296" marR="54864" marT="18288" marB="18288">
+                    <a:solidFill>
+                      <a:srgbClr val="FFFFFF"/>
+                    </a:solidFill>
+                  </a:tcPr>
+                </a:tc>
+                <a:tc>
+                  <a:txBody>
+                    <a:bodyPr wrap="square"/>
+                    <a:lstStyle/>
+                    <a:p>
+                      <a:r>
+                        <a:rPr sz="1100" b="0">
+                          <a:solidFill>
+                            <a:srgbClr val="535C6A"/>
+                          </a:solidFill>
+                          <a:latin typeface="Segoe UI"/>
+                        </a:rPr>
+                        <a:t>Upgrade opportunities present</a:t>
+                      </a:r>
+                    </a:p>
+                  </a:txBody>
+                  <a:tcPr anchor="ctr" marL="82296" marR="54864" marT="18288" marB="18288">
+                    <a:solidFill>
+                      <a:srgbClr val="FFFFFF"/>
+                    </a:solidFill>
+                  </a:tcPr>
+                </a:tc>
+                <a:tc>
+                  <a:txBody>
+                    <a:bodyPr wrap="square"/>
+                    <a:lstStyle/>
+                    <a:p>
+                      <a:r>
+                        <a:rPr sz="1100" b="0">
+                          <a:solidFill>
+                            <a:srgbClr val="535C6A"/>
+                          </a:solidFill>
+                          <a:latin typeface="Segoe UI"/>
+                        </a:rPr>
+                        <a:t>count</a:t>
+                      </a:r>
+                    </a:p>
+                  </a:txBody>
+                  <a:tcPr anchor="ctr" marL="82296" marR="54864" marT="18288" marB="18288">
+                    <a:solidFill>
+                      <a:srgbClr val="FFFFFF"/>
+                    </a:solidFill>
+                  </a:tcPr>
+                </a:tc>
+              </a:tr>
+              <a:tr h="329184">
+                <a:tc>
+                  <a:txBody>
+                    <a:bodyPr wrap="square"/>
+                    <a:lstStyle/>
+                    <a:p>
+                      <a:r>
+                        <a:rPr sz="1100" b="1">
+                          <a:solidFill>
+                            <a:srgbClr val="1A1F27"/>
+                          </a:solidFill>
+                          <a:latin typeface="Segoe UI"/>
+                        </a:rPr>
+                        <a:t>upgrade_opportunity_missed</a:t>
+                      </a:r>
+                    </a:p>
+                  </a:txBody>
+                  <a:tcPr anchor="ctr" marL="82296" marR="54864" marT="18288" marB="18288">
+                    <a:solidFill>
+                      <a:srgbClr val="F7F9F8"/>
+                    </a:solidFill>
+                  </a:tcPr>
+                </a:tc>
+                <a:tc>
+                  <a:txBody>
+                    <a:bodyPr wrap="square"/>
+                    <a:lstStyle/>
+                    <a:p>
+                      <a:r>
+                        <a:rPr sz="1100" b="0">
+                          <a:solidFill>
+                            <a:srgbClr val="535C6A"/>
+                          </a:solidFill>
+                          <a:latin typeface="Segoe UI"/>
+                        </a:rPr>
+                        <a:t>Share of upgrade opportunities not pitched</a:t>
+                      </a:r>
+                    </a:p>
+                  </a:txBody>
+                  <a:tcPr anchor="ctr" marL="82296" marR="54864" marT="18288" marB="18288">
+                    <a:solidFill>
+                      <a:srgbClr val="F7F9F8"/>
+                    </a:solidFill>
+                  </a:tcPr>
+                </a:tc>
+                <a:tc>
+                  <a:txBody>
+                    <a:bodyPr wrap="square"/>
+                    <a:lstStyle/>
+                    <a:p>
+                      <a:r>
+                        <a:rPr sz="1100" b="0">
+                          <a:solidFill>
+                            <a:srgbClr val="535C6A"/>
+                          </a:solidFill>
+                          <a:latin typeface="Segoe UI"/>
+                        </a:rPr>
+                        <a:t>rate</a:t>
+                      </a:r>
+                    </a:p>
+                  </a:txBody>
+                  <a:tcPr anchor="ctr" marL="82296" marR="54864" marT="18288" marB="18288">
+                    <a:solidFill>
+                      <a:srgbClr val="F7F9F8"/>
+                    </a:solidFill>
+                  </a:tcPr>
+                </a:tc>
+              </a:tr>
+              <a:tr h="329184">
+                <a:tc>
+                  <a:txBody>
+                    <a:bodyPr wrap="square"/>
+                    <a:lstStyle/>
+                    <a:p>
+                      <a:r>
+                        <a:rPr sz="1100" b="1">
+                          <a:solidFill>
+                            <a:srgbClr val="1A1F27"/>
+                          </a:solidFill>
+                          <a:latin typeface="Segoe UI"/>
+                        </a:rPr>
+                        <a:t>save_attempts</a:t>
+                      </a:r>
+                    </a:p>
+                  </a:txBody>
+                  <a:tcPr anchor="ctr" marL="82296" marR="54864" marT="18288" marB="18288">
+                    <a:solidFill>
+                      <a:srgbClr val="FFFFFF"/>
+                    </a:solidFill>
+                  </a:tcPr>
+                </a:tc>
+                <a:tc>
+                  <a:txBody>
+                    <a:bodyPr wrap="square"/>
+                    <a:lstStyle/>
+                    <a:p>
+                      <a:r>
+                        <a:rPr sz="1100" b="0">
+                          <a:solidFill>
+                            <a:srgbClr val="535C6A"/>
+                          </a:solidFill>
+                          <a:latin typeface="Segoe UI"/>
+                        </a:rPr>
+                        <a:t>Retention save attempts</a:t>
+                      </a:r>
+                    </a:p>
+                  </a:txBody>
+                  <a:tcPr anchor="ctr" marL="82296" marR="54864" marT="18288" marB="18288">
+                    <a:solidFill>
+                      <a:srgbClr val="FFFFFF"/>
+                    </a:solidFill>
+                  </a:tcPr>
+                </a:tc>
+                <a:tc>
+                  <a:txBody>
+                    <a:bodyPr wrap="square"/>
+                    <a:lstStyle/>
+                    <a:p>
+                      <a:r>
+                        <a:rPr sz="1100" b="0">
+                          <a:solidFill>
+                            <a:srgbClr val="535C6A"/>
+                          </a:solidFill>
+                          <a:latin typeface="Segoe UI"/>
+                        </a:rPr>
+                        <a:t>count</a:t>
+                      </a:r>
+                    </a:p>
+                  </a:txBody>
+                  <a:tcPr anchor="ctr" marL="82296" marR="54864" marT="18288" marB="18288">
+                    <a:solidFill>
+                      <a:srgbClr val="FFFFFF"/>
+                    </a:solidFill>
+                  </a:tcPr>
+                </a:tc>
+              </a:tr>
+              <a:tr h="329184">
+                <a:tc>
+                  <a:txBody>
+                    <a:bodyPr wrap="square"/>
+                    <a:lstStyle/>
+                    <a:p>
+                      <a:r>
+                        <a:rPr sz="1100" b="1">
+                          <a:solidFill>
+                            <a:srgbClr val="1A1F27"/>
+                          </a:solidFill>
+                          <a:latin typeface="Segoe UI"/>
+                        </a:rPr>
+                        <a:t>escalations</a:t>
+                      </a:r>
+                    </a:p>
+                  </a:txBody>
+                  <a:tcPr anchor="ctr" marL="82296" marR="54864" marT="18288" marB="18288">
+                    <a:solidFill>
+                      <a:srgbClr val="F7F9F8"/>
+                    </a:solidFill>
+                  </a:tcPr>
+                </a:tc>
+                <a:tc>
+                  <a:txBody>
+                    <a:bodyPr wrap="square"/>
+                    <a:lstStyle/>
+                    <a:p>
+                      <a:r>
+                        <a:rPr sz="1100" b="0">
+                          <a:solidFill>
+                            <a:srgbClr val="535C6A"/>
+                          </a:solidFill>
+                          <a:latin typeface="Segoe UI"/>
+                        </a:rPr>
+                        <a:t>Calls with an escalation</a:t>
+                      </a:r>
+                    </a:p>
+                  </a:txBody>
+                  <a:tcPr anchor="ctr" marL="82296" marR="54864" marT="18288" marB="18288">
+                    <a:solidFill>
+                      <a:srgbClr val="F7F9F8"/>
+                    </a:solidFill>
+                  </a:tcPr>
+                </a:tc>
+                <a:tc>
+                  <a:txBody>
+                    <a:bodyPr wrap="square"/>
+                    <a:lstStyle/>
+                    <a:p>
+                      <a:r>
+                        <a:rPr sz="1100" b="0">
+                          <a:solidFill>
+                            <a:srgbClr val="535C6A"/>
+                          </a:solidFill>
+                          <a:latin typeface="Segoe UI"/>
+                        </a:rPr>
+                        <a:t>count</a:t>
+                      </a:r>
+                    </a:p>
+                  </a:txBody>
+                  <a:tcPr anchor="ctr" marL="82296" marR="54864" marT="18288" marB="18288">
+                    <a:solidFill>
+                      <a:srgbClr val="F7F9F8"/>
+                    </a:solidFill>
+                  </a:tcPr>
+                </a:tc>
+              </a:tr>
+              <a:tr h="329184">
+                <a:tc>
+                  <a:txBody>
+                    <a:bodyPr wrap="square"/>
+                    <a:lstStyle/>
+                    <a:p>
+                      <a:r>
+                        <a:rPr sz="1100" b="1">
+                          <a:solidFill>
+                            <a:srgbClr val="1A1F27"/>
+                          </a:solidFill>
+                          <a:latin typeface="Segoe UI"/>
+                        </a:rPr>
+                        <a:t>fwa_attempts</a:t>
+                      </a:r>
+                    </a:p>
+                  </a:txBody>
+                  <a:tcPr anchor="ctr" marL="82296" marR="54864" marT="18288" marB="18288">
+                    <a:solidFill>
+                      <a:srgbClr val="FFFFFF"/>
+                    </a:solidFill>
+                  </a:tcPr>
+                </a:tc>
+                <a:tc>
+                  <a:txBody>
+                    <a:bodyPr wrap="square"/>
+                    <a:lstStyle/>
+                    <a:p>
+                      <a:r>
+                        <a:rPr sz="1100" b="0">
+                          <a:solidFill>
+                            <a:srgbClr val="535C6A"/>
+                          </a:solidFill>
+                          <a:latin typeface="Segoe UI"/>
+                        </a:rPr>
+                        <a:t>Fixed-wireless-access pitches</a:t>
+                      </a:r>
+                    </a:p>
+                  </a:txBody>
+                  <a:tcPr anchor="ctr" marL="82296" marR="54864" marT="18288" marB="18288">
+                    <a:solidFill>
+                      <a:srgbClr val="FFFFFF"/>
+                    </a:solidFill>
+                  </a:tcPr>
+                </a:tc>
+                <a:tc>
+                  <a:txBody>
+                    <a:bodyPr wrap="square"/>
+                    <a:lstStyle/>
+                    <a:p>
+                      <a:r>
+                        <a:rPr sz="1100" b="0">
+                          <a:solidFill>
+                            <a:srgbClr val="535C6A"/>
+                          </a:solidFill>
+                          <a:latin typeface="Segoe UI"/>
+                        </a:rPr>
+                        <a:t>count</a:t>
+                      </a:r>
+                    </a:p>
+                  </a:txBody>
+                  <a:tcPr anchor="ctr" marL="82296" marR="54864" marT="18288" marB="18288">
+                    <a:solidFill>
+                      <a:srgbClr val="FFFFFF"/>
+                    </a:solidFill>
+                  </a:tcPr>
+                </a:tc>
+              </a:tr>
+              <a:tr h="329184">
+                <a:tc>
+                  <a:txBody>
+                    <a:bodyPr wrap="square"/>
+                    <a:lstStyle/>
+                    <a:p>
+                      <a:r>
+                        <a:rPr sz="1100" b="1">
+                          <a:solidFill>
+                            <a:srgbClr val="1A1F27"/>
+                          </a:solidFill>
+                          <a:latin typeface="Segoe UI"/>
+                        </a:rPr>
+                        <a:t>mobile_protection_attempts</a:t>
+                      </a:r>
+                    </a:p>
+                  </a:txBody>
+                  <a:tcPr anchor="ctr" marL="82296" marR="54864" marT="18288" marB="18288">
+                    <a:solidFill>
+                      <a:srgbClr val="F7F9F8"/>
+                    </a:solidFill>
+                  </a:tcPr>
+                </a:tc>
+                <a:tc>
+                  <a:txBody>
+                    <a:bodyPr wrap="square"/>
+                    <a:lstStyle/>
+                    <a:p>
+                      <a:r>
+                        <a:rPr sz="1100" b="0">
+                          <a:solidFill>
+                            <a:srgbClr val="535C6A"/>
+                          </a:solidFill>
+                          <a:latin typeface="Segoe UI"/>
+                        </a:rPr>
+                        <a:t>Mobile-protection pitches</a:t>
+                      </a:r>
+                    </a:p>
+                  </a:txBody>
+                  <a:tcPr anchor="ctr" marL="82296" marR="54864" marT="18288" marB="18288">
+                    <a:solidFill>
+                      <a:srgbClr val="F7F9F8"/>
+                    </a:solidFill>
+                  </a:tcPr>
+                </a:tc>
+                <a:tc>
+                  <a:txBody>
+                    <a:bodyPr wrap="square"/>
+                    <a:lstStyle/>
+                    <a:p>
+                      <a:r>
+                        <a:rPr sz="1100" b="0">
+                          <a:solidFill>
+                            <a:srgbClr val="535C6A"/>
+                          </a:solidFill>
+                          <a:latin typeface="Segoe UI"/>
+                        </a:rPr>
+                        <a:t>count</a:t>
+                      </a:r>
+                    </a:p>
+                  </a:txBody>
+                  <a:tcPr anchor="ctr" marL="82296" marR="54864" marT="18288" marB="18288">
+                    <a:solidFill>
+                      <a:srgbClr val="F7F9F8"/>
+                    </a:solidFill>
+                  </a:tcPr>
+                </a:tc>
+              </a:tr>
+              <a:tr h="329184">
+                <a:tc>
+                  <a:txBody>
+                    <a:bodyPr wrap="square"/>
+                    <a:lstStyle/>
+                    <a:p>
+                      <a:r>
+                        <a:rPr sz="1100" b="1">
+                          <a:solidFill>
+                            <a:srgbClr val="1A1F27"/>
+                          </a:solidFill>
+                          <a:latin typeface="Segoe UI"/>
+                        </a:rPr>
+                        <a:t>we_got_you_utterances</a:t>
+                      </a:r>
+                    </a:p>
+                  </a:txBody>
+                  <a:tcPr anchor="ctr" marL="82296" marR="54864" marT="18288" marB="18288">
+                    <a:solidFill>
+                      <a:srgbClr val="FFFFFF"/>
+                    </a:solidFill>
+                  </a:tcPr>
+                </a:tc>
+                <a:tc>
+                  <a:txBody>
+                    <a:bodyPr wrap="square"/>
+                    <a:lstStyle/>
+                    <a:p>
+                      <a:r>
+                        <a:rPr sz="1100" b="0">
+                          <a:solidFill>
+                            <a:srgbClr val="535C6A"/>
+                          </a:solidFill>
+                          <a:latin typeface="Segoe UI"/>
+                        </a:rPr>
+                        <a:t>Reassurance phrasing used</a:t>
+                      </a:r>
+                    </a:p>
+                  </a:txBody>
+                  <a:tcPr anchor="ctr" marL="82296" marR="54864" marT="18288" marB="18288">
+                    <a:solidFill>
+                      <a:srgbClr val="FFFFFF"/>
+                    </a:solidFill>
+                  </a:tcPr>
+                </a:tc>
+                <a:tc>
+                  <a:txBody>
+                    <a:bodyPr wrap="square"/>
+                    <a:lstStyle/>
+                    <a:p>
+                      <a:r>
+                        <a:rPr sz="1100" b="0">
+                          <a:solidFill>
+                            <a:srgbClr val="535C6A"/>
+                          </a:solidFill>
+                          <a:latin typeface="Segoe UI"/>
+                        </a:rPr>
+                        <a:t>count</a:t>
+                      </a:r>
+                    </a:p>
+                  </a:txBody>
+                  <a:tcPr anchor="ctr" marL="82296" marR="54864" marT="18288" marB="18288">
+                    <a:solidFill>
+                      <a:srgbClr val="FFFFFF"/>
+                    </a:solidFill>
+                  </a:tcPr>
+                </a:tc>
+              </a:tr>
+              <a:tr h="329184">
+                <a:tc>
+                  <a:txBody>
+                    <a:bodyPr wrap="square"/>
+                    <a:lstStyle/>
+                    <a:p>
+                      <a:r>
+                        <a:rPr sz="1100" b="1">
+                          <a:solidFill>
+                            <a:srgbClr val="1A1F27"/>
+                          </a:solidFill>
+                          <a:latin typeface="Segoe UI"/>
+                        </a:rPr>
+                        <a:t>customer_experience</a:t>
+                      </a:r>
+                    </a:p>
+                  </a:txBody>
+                  <a:tcPr anchor="ctr" marL="82296" marR="54864" marT="18288" marB="18288">
+                    <a:solidFill>
+                      <a:srgbClr val="F7F9F8"/>
+                    </a:solidFill>
+                  </a:tcPr>
+                </a:tc>
+                <a:tc>
+                  <a:txBody>
+                    <a:bodyPr wrap="square"/>
+                    <a:lstStyle/>
+                    <a:p>
+                      <a:r>
+                        <a:rPr sz="1100" b="0">
+                          <a:solidFill>
+                            <a:srgbClr val="535C6A"/>
+                          </a:solidFill>
+                          <a:latin typeface="Segoe UI"/>
+                        </a:rPr>
+                        <a:t>Rated calls not rated “Poor”</a:t>
+                      </a:r>
+                    </a:p>
+                  </a:txBody>
+                  <a:tcPr anchor="ctr" marL="82296" marR="54864" marT="18288" marB="18288">
+                    <a:solidFill>
+                      <a:srgbClr val="F7F9F8"/>
+                    </a:solidFill>
+                  </a:tcPr>
+                </a:tc>
+                <a:tc>
+                  <a:txBody>
+                    <a:bodyPr wrap="square"/>
+                    <a:lstStyle/>
+                    <a:p>
+                      <a:r>
+                        <a:rPr sz="1100" b="0">
+                          <a:solidFill>
+                            <a:srgbClr val="535C6A"/>
+                          </a:solidFill>
+                          <a:latin typeface="Segoe UI"/>
+                        </a:rPr>
+                        <a:t>rate</a:t>
+                      </a:r>
+                    </a:p>
+                  </a:txBody>
+                  <a:tcPr anchor="ctr" marL="82296" marR="54864" marT="18288" marB="18288">
+                    <a:solidFill>
+                      <a:srgbClr val="F7F9F8"/>
+                    </a:solidFill>
+                  </a:tcPr>
+                </a:tc>
+              </a:tr>
+            </a:tbl>
+          </a:graphicData>
+        </a:graphic>
+      </p:graphicFrame>
     </p:spTree>
   </p:cSld>
   <p:clrMapOvr>
@@ -3966,7 +5140,7 @@
             <a:avLst/>
           </a:prstGeom>
           <a:solidFill>
-            <a:srgbClr val="2E8B5E"/>
+            <a:srgbClr val="0E7C74"/>
           </a:solidFill>
           <a:ln>
             <a:noFill/>
@@ -4002,8 +5176,8 @@
         </p:nvSpPr>
         <p:spPr>
           <a:xfrm>
-            <a:off x="640080" y="457200"/>
-            <a:ext cx="10972800" cy="1371600"/>
+            <a:off x="640080" y="384048"/>
+            <a:ext cx="11155680" cy="1280160"/>
           </a:xfrm>
           <a:prstGeom prst="rect">
             <a:avLst/>
@@ -4018,17 +5192,17 @@
           <a:p>
             <a:pPr>
               <a:spcAft>
-                <a:spcPts val="600"/>
+                <a:spcPts val="500"/>
               </a:spcAft>
             </a:pPr>
             <a:r>
               <a:rPr sz="1250" b="1">
                 <a:solidFill>
-                  <a:srgbClr val="2E8B5E"/>
+                  <a:srgbClr val="0E7C74"/>
                 </a:solidFill>
                 <a:latin typeface="Segoe UI"/>
               </a:rPr>
-              <a:t>WHAT'S THERE</a:t>
+              <a:t>KPIS · WCC (11)</a:t>
             </a:r>
           </a:p>
           <a:p>
@@ -4038,120 +5212,860 @@
               </a:spcAft>
             </a:pPr>
             <a:r>
-              <a:rPr sz="3000" b="1">
+              <a:rPr sz="2700" b="1">
                 <a:solidFill>
                   <a:srgbClr val="1A1F27"/>
                 </a:solidFill>
                 <a:latin typeface="Segoe UI"/>
               </a:rPr>
-              <a:t>A solid, documented foundation</a:t>
+              <a:t>Care &amp; retention</a:t>
             </a:r>
           </a:p>
         </p:txBody>
       </p:sp>
-      <p:sp>
-        <p:nvSpPr>
-          <p:cNvPr id="4" name="TextBox 3"/>
-          <p:cNvSpPr txBox="1"/>
+      <p:graphicFrame>
+        <p:nvGraphicFramePr>
+          <p:cNvPr id="4" name="Table 3"/>
+          <p:cNvGraphicFramePr>
+            <a:graphicFrameLocks noGrp="1"/>
+          </p:cNvGraphicFramePr>
           <p:nvPr/>
-        </p:nvSpPr>
-        <p:spPr>
-          <a:xfrm>
-            <a:off x="685800" y="1965960"/>
-            <a:ext cx="10881360" cy="4297680"/>
-          </a:xfrm>
-          <a:prstGeom prst="rect">
-            <a:avLst/>
-          </a:prstGeom>
-          <a:noFill/>
-        </p:spPr>
-        <p:txBody>
-          <a:bodyPr wrap="square">
-            <a:spAutoFit/>
-          </a:bodyPr>
-          <a:lstStyle/>
-          <a:p>
-            <a:pPr>
-              <a:spcAft>
-                <a:spcPts val="1600"/>
-              </a:spcAft>
-            </a:pPr>
-            <a:r>
-              <a:rPr sz="1800" b="0">
-                <a:solidFill>
-                  <a:srgbClr val="1A1F27"/>
-                </a:solidFill>
-                <a:latin typeface="Segoe UI"/>
-              </a:rPr>
-              <a:t>All 47 KPIs mapped — source field, how it's calculated, unit, and meaning.</a:t>
-            </a:r>
-          </a:p>
-          <a:p>
-            <a:pPr>
-              <a:spcAft>
-                <a:spcPts val="1600"/>
-              </a:spcAft>
-            </a:pPr>
-            <a:r>
-              <a:rPr sz="1800" b="0">
-                <a:solidFill>
-                  <a:srgbClr val="1A1F27"/>
-                </a:solidFill>
-                <a:latin typeface="Segoe UI"/>
-              </a:rPr>
-              <a:t>All 3 programs fully documented in a single KPI dictionary.</a:t>
-            </a:r>
-          </a:p>
-          <a:p>
-            <a:pPr>
-              <a:spcAft>
-                <a:spcPts val="1600"/>
-              </a:spcAft>
-            </a:pPr>
-            <a:r>
-              <a:rPr sz="1800" b="0">
-                <a:solidFill>
-                  <a:srgbClr val="1A1F27"/>
-                </a:solidFill>
-                <a:latin typeface="Segoe UI"/>
-              </a:rPr>
-              <a:t>Evidence trail on every judgment — coaching is auditable.</a:t>
-            </a:r>
-          </a:p>
-          <a:p>
-            <a:pPr>
-              <a:spcAft>
-                <a:spcPts val="1600"/>
-              </a:spcAft>
-            </a:pPr>
-            <a:r>
-              <a:rPr sz="1800" b="0">
-                <a:solidFill>
-                  <a:srgbClr val="1A1F27"/>
-                </a:solidFill>
-                <a:latin typeface="Segoe UI"/>
-              </a:rPr>
-              <a:t>Metric-labelling already corrected (counts vs. rates).</a:t>
-            </a:r>
-          </a:p>
-          <a:p>
-            <a:pPr>
-              <a:spcAft>
-                <a:spcPts val="1600"/>
-              </a:spcAft>
-            </a:pPr>
-            <a:r>
-              <a:rPr sz="1800" b="0">
-                <a:solidFill>
-                  <a:srgbClr val="1A1F27"/>
-                </a:solidFill>
-                <a:latin typeface="Segoe UI"/>
-              </a:rPr>
-              <a:t>The platform to evaluate and improve prompts is integrated and ready.</a:t>
-            </a:r>
-          </a:p>
-        </p:txBody>
-      </p:sp>
+        </p:nvGraphicFramePr>
+        <p:xfrm>
+          <a:off x="640080" y="1783080"/>
+          <a:ext cx="10927080" cy="4169664"/>
+        </p:xfrm>
+        <a:graphic>
+          <a:graphicData uri="http://schemas.openxmlformats.org/drawingml/2006/table">
+            <a:tbl>
+              <a:tblPr firstRow="1">
+                <a:tableStyleId>{5C22544A-7EE6-4342-B048-85BDC9FD1C3A}</a:tableStyleId>
+              </a:tblPr>
+              <a:tblGrid>
+                <a:gridCol w="3200400"/>
+                <a:gridCol w="6446520"/>
+                <a:gridCol w="1280160"/>
+              </a:tblGrid>
+              <a:tr h="347472">
+                <a:tc>
+                  <a:txBody>
+                    <a:bodyPr wrap="square"/>
+                    <a:lstStyle/>
+                    <a:p>
+                      <a:r>
+                        <a:rPr sz="1100" b="1">
+                          <a:solidFill>
+                            <a:srgbClr val="FFFFFF"/>
+                          </a:solidFill>
+                          <a:latin typeface="Segoe UI"/>
+                        </a:rPr>
+                        <a:t>KPI</a:t>
+                      </a:r>
+                    </a:p>
+                  </a:txBody>
+                  <a:tcPr anchor="ctr" marL="82296" marR="54864" marT="18288" marB="18288">
+                    <a:solidFill>
+                      <a:srgbClr val="0E7C74"/>
+                    </a:solidFill>
+                  </a:tcPr>
+                </a:tc>
+                <a:tc>
+                  <a:txBody>
+                    <a:bodyPr wrap="square"/>
+                    <a:lstStyle/>
+                    <a:p>
+                      <a:r>
+                        <a:rPr sz="1100" b="1">
+                          <a:solidFill>
+                            <a:srgbClr val="FFFFFF"/>
+                          </a:solidFill>
+                          <a:latin typeface="Segoe UI"/>
+                        </a:rPr>
+                        <a:t>What it measures</a:t>
+                      </a:r>
+                    </a:p>
+                  </a:txBody>
+                  <a:tcPr anchor="ctr" marL="82296" marR="54864" marT="18288" marB="18288">
+                    <a:solidFill>
+                      <a:srgbClr val="0E7C74"/>
+                    </a:solidFill>
+                  </a:tcPr>
+                </a:tc>
+                <a:tc>
+                  <a:txBody>
+                    <a:bodyPr wrap="square"/>
+                    <a:lstStyle/>
+                    <a:p>
+                      <a:r>
+                        <a:rPr sz="1100" b="1">
+                          <a:solidFill>
+                            <a:srgbClr val="FFFFFF"/>
+                          </a:solidFill>
+                          <a:latin typeface="Segoe UI"/>
+                        </a:rPr>
+                        <a:t>Unit</a:t>
+                      </a:r>
+                    </a:p>
+                  </a:txBody>
+                  <a:tcPr anchor="ctr" marL="82296" marR="54864" marT="18288" marB="18288">
+                    <a:solidFill>
+                      <a:srgbClr val="0E7C74"/>
+                    </a:solidFill>
+                  </a:tcPr>
+                </a:tc>
+              </a:tr>
+              <a:tr h="347472">
+                <a:tc>
+                  <a:txBody>
+                    <a:bodyPr wrap="square"/>
+                    <a:lstStyle/>
+                    <a:p>
+                      <a:r>
+                        <a:rPr sz="1100" b="1">
+                          <a:solidFill>
+                            <a:srgbClr val="1A1F27"/>
+                          </a:solidFill>
+                          <a:latin typeface="Segoe UI"/>
+                        </a:rPr>
+                        <a:t>resolution_opportunities</a:t>
+                      </a:r>
+                    </a:p>
+                  </a:txBody>
+                  <a:tcPr anchor="ctr" marL="82296" marR="54864" marT="18288" marB="18288">
+                    <a:solidFill>
+                      <a:srgbClr val="FFFFFF"/>
+                    </a:solidFill>
+                  </a:tcPr>
+                </a:tc>
+                <a:tc>
+                  <a:txBody>
+                    <a:bodyPr wrap="square"/>
+                    <a:lstStyle/>
+                    <a:p>
+                      <a:r>
+                        <a:rPr sz="1100" b="0">
+                          <a:solidFill>
+                            <a:srgbClr val="535C6A"/>
+                          </a:solidFill>
+                          <a:latin typeface="Segoe UI"/>
+                        </a:rPr>
+                        <a:t>Calls where the issue could be resolved</a:t>
+                      </a:r>
+                    </a:p>
+                  </a:txBody>
+                  <a:tcPr anchor="ctr" marL="82296" marR="54864" marT="18288" marB="18288">
+                    <a:solidFill>
+                      <a:srgbClr val="FFFFFF"/>
+                    </a:solidFill>
+                  </a:tcPr>
+                </a:tc>
+                <a:tc>
+                  <a:txBody>
+                    <a:bodyPr wrap="square"/>
+                    <a:lstStyle/>
+                    <a:p>
+                      <a:r>
+                        <a:rPr sz="1100" b="0">
+                          <a:solidFill>
+                            <a:srgbClr val="535C6A"/>
+                          </a:solidFill>
+                          <a:latin typeface="Segoe UI"/>
+                        </a:rPr>
+                        <a:t>count</a:t>
+                      </a:r>
+                    </a:p>
+                  </a:txBody>
+                  <a:tcPr anchor="ctr" marL="82296" marR="54864" marT="18288" marB="18288">
+                    <a:solidFill>
+                      <a:srgbClr val="FFFFFF"/>
+                    </a:solidFill>
+                  </a:tcPr>
+                </a:tc>
+              </a:tr>
+              <a:tr h="347472">
+                <a:tc>
+                  <a:txBody>
+                    <a:bodyPr wrap="square"/>
+                    <a:lstStyle/>
+                    <a:p>
+                      <a:r>
+                        <a:rPr sz="1100" b="1">
+                          <a:solidFill>
+                            <a:srgbClr val="1A1F27"/>
+                          </a:solidFill>
+                          <a:latin typeface="Segoe UI"/>
+                        </a:rPr>
+                        <a:t>resolutions</a:t>
+                      </a:r>
+                    </a:p>
+                  </a:txBody>
+                  <a:tcPr anchor="ctr" marL="82296" marR="54864" marT="18288" marB="18288">
+                    <a:solidFill>
+                      <a:srgbClr val="F7F9F8"/>
+                    </a:solidFill>
+                  </a:tcPr>
+                </a:tc>
+                <a:tc>
+                  <a:txBody>
+                    <a:bodyPr wrap="square"/>
+                    <a:lstStyle/>
+                    <a:p>
+                      <a:r>
+                        <a:rPr sz="1100" b="0">
+                          <a:solidFill>
+                            <a:srgbClr val="535C6A"/>
+                          </a:solidFill>
+                          <a:latin typeface="Segoe UI"/>
+                        </a:rPr>
+                        <a:t>Of those, calls actually resolved</a:t>
+                      </a:r>
+                    </a:p>
+                  </a:txBody>
+                  <a:tcPr anchor="ctr" marL="82296" marR="54864" marT="18288" marB="18288">
+                    <a:solidFill>
+                      <a:srgbClr val="F7F9F8"/>
+                    </a:solidFill>
+                  </a:tcPr>
+                </a:tc>
+                <a:tc>
+                  <a:txBody>
+                    <a:bodyPr wrap="square"/>
+                    <a:lstStyle/>
+                    <a:p>
+                      <a:r>
+                        <a:rPr sz="1100" b="0">
+                          <a:solidFill>
+                            <a:srgbClr val="535C6A"/>
+                          </a:solidFill>
+                          <a:latin typeface="Segoe UI"/>
+                        </a:rPr>
+                        <a:t>count</a:t>
+                      </a:r>
+                    </a:p>
+                  </a:txBody>
+                  <a:tcPr anchor="ctr" marL="82296" marR="54864" marT="18288" marB="18288">
+                    <a:solidFill>
+                      <a:srgbClr val="F7F9F8"/>
+                    </a:solidFill>
+                  </a:tcPr>
+                </a:tc>
+              </a:tr>
+              <a:tr h="347472">
+                <a:tc>
+                  <a:txBody>
+                    <a:bodyPr wrap="square"/>
+                    <a:lstStyle/>
+                    <a:p>
+                      <a:r>
+                        <a:rPr sz="1100" b="1">
+                          <a:solidFill>
+                            <a:srgbClr val="1A1F27"/>
+                          </a:solidFill>
+                          <a:latin typeface="Segoe UI"/>
+                        </a:rPr>
+                        <a:t>survival_opportunities</a:t>
+                      </a:r>
+                    </a:p>
+                  </a:txBody>
+                  <a:tcPr anchor="ctr" marL="82296" marR="54864" marT="18288" marB="18288">
+                    <a:solidFill>
+                      <a:srgbClr val="FFFFFF"/>
+                    </a:solidFill>
+                  </a:tcPr>
+                </a:tc>
+                <a:tc>
+                  <a:txBody>
+                    <a:bodyPr wrap="square"/>
+                    <a:lstStyle/>
+                    <a:p>
+                      <a:r>
+                        <a:rPr sz="1100" b="0">
+                          <a:solidFill>
+                            <a:srgbClr val="535C6A"/>
+                          </a:solidFill>
+                          <a:latin typeface="Segoe UI"/>
+                        </a:rPr>
+                        <a:t>Calls with churn / retention risk present</a:t>
+                      </a:r>
+                    </a:p>
+                  </a:txBody>
+                  <a:tcPr anchor="ctr" marL="82296" marR="54864" marT="18288" marB="18288">
+                    <a:solidFill>
+                      <a:srgbClr val="FFFFFF"/>
+                    </a:solidFill>
+                  </a:tcPr>
+                </a:tc>
+                <a:tc>
+                  <a:txBody>
+                    <a:bodyPr wrap="square"/>
+                    <a:lstStyle/>
+                    <a:p>
+                      <a:r>
+                        <a:rPr sz="1100" b="0">
+                          <a:solidFill>
+                            <a:srgbClr val="535C6A"/>
+                          </a:solidFill>
+                          <a:latin typeface="Segoe UI"/>
+                        </a:rPr>
+                        <a:t>count</a:t>
+                      </a:r>
+                    </a:p>
+                  </a:txBody>
+                  <a:tcPr anchor="ctr" marL="82296" marR="54864" marT="18288" marB="18288">
+                    <a:solidFill>
+                      <a:srgbClr val="FFFFFF"/>
+                    </a:solidFill>
+                  </a:tcPr>
+                </a:tc>
+              </a:tr>
+              <a:tr h="347472">
+                <a:tc>
+                  <a:txBody>
+                    <a:bodyPr wrap="square"/>
+                    <a:lstStyle/>
+                    <a:p>
+                      <a:r>
+                        <a:rPr sz="1100" b="1">
+                          <a:solidFill>
+                            <a:srgbClr val="1A1F27"/>
+                          </a:solidFill>
+                          <a:latin typeface="Segoe UI"/>
+                        </a:rPr>
+                        <a:t>saves</a:t>
+                      </a:r>
+                    </a:p>
+                  </a:txBody>
+                  <a:tcPr anchor="ctr" marL="82296" marR="54864" marT="18288" marB="18288">
+                    <a:solidFill>
+                      <a:srgbClr val="F7F9F8"/>
+                    </a:solidFill>
+                  </a:tcPr>
+                </a:tc>
+                <a:tc>
+                  <a:txBody>
+                    <a:bodyPr wrap="square"/>
+                    <a:lstStyle/>
+                    <a:p>
+                      <a:r>
+                        <a:rPr sz="1100" b="0">
+                          <a:solidFill>
+                            <a:srgbClr val="535C6A"/>
+                          </a:solidFill>
+                          <a:latin typeface="Segoe UI"/>
+                        </a:rPr>
+                        <a:t>Of those, customers retained</a:t>
+                      </a:r>
+                    </a:p>
+                  </a:txBody>
+                  <a:tcPr anchor="ctr" marL="82296" marR="54864" marT="18288" marB="18288">
+                    <a:solidFill>
+                      <a:srgbClr val="F7F9F8"/>
+                    </a:solidFill>
+                  </a:tcPr>
+                </a:tc>
+                <a:tc>
+                  <a:txBody>
+                    <a:bodyPr wrap="square"/>
+                    <a:lstStyle/>
+                    <a:p>
+                      <a:r>
+                        <a:rPr sz="1100" b="0">
+                          <a:solidFill>
+                            <a:srgbClr val="535C6A"/>
+                          </a:solidFill>
+                          <a:latin typeface="Segoe UI"/>
+                        </a:rPr>
+                        <a:t>count</a:t>
+                      </a:r>
+                    </a:p>
+                  </a:txBody>
+                  <a:tcPr anchor="ctr" marL="82296" marR="54864" marT="18288" marB="18288">
+                    <a:solidFill>
+                      <a:srgbClr val="F7F9F8"/>
+                    </a:solidFill>
+                  </a:tcPr>
+                </a:tc>
+              </a:tr>
+              <a:tr h="347472">
+                <a:tc>
+                  <a:txBody>
+                    <a:bodyPr wrap="square"/>
+                    <a:lstStyle/>
+                    <a:p>
+                      <a:r>
+                        <a:rPr sz="1100" b="1">
+                          <a:solidFill>
+                            <a:srgbClr val="1A1F27"/>
+                          </a:solidFill>
+                          <a:latin typeface="Segoe UI"/>
+                        </a:rPr>
+                        <a:t>right_of_sell_opportunities</a:t>
+                      </a:r>
+                    </a:p>
+                  </a:txBody>
+                  <a:tcPr anchor="ctr" marL="82296" marR="54864" marT="18288" marB="18288">
+                    <a:solidFill>
+                      <a:srgbClr val="FFFFFF"/>
+                    </a:solidFill>
+                  </a:tcPr>
+                </a:tc>
+                <a:tc>
+                  <a:txBody>
+                    <a:bodyPr wrap="square"/>
+                    <a:lstStyle/>
+                    <a:p>
+                      <a:r>
+                        <a:rPr sz="1100" b="0">
+                          <a:solidFill>
+                            <a:srgbClr val="535C6A"/>
+                          </a:solidFill>
+                          <a:latin typeface="Segoe UI"/>
+                        </a:rPr>
+                        <a:t>Calls where a sell was appropriate</a:t>
+                      </a:r>
+                    </a:p>
+                  </a:txBody>
+                  <a:tcPr anchor="ctr" marL="82296" marR="54864" marT="18288" marB="18288">
+                    <a:solidFill>
+                      <a:srgbClr val="FFFFFF"/>
+                    </a:solidFill>
+                  </a:tcPr>
+                </a:tc>
+                <a:tc>
+                  <a:txBody>
+                    <a:bodyPr wrap="square"/>
+                    <a:lstStyle/>
+                    <a:p>
+                      <a:r>
+                        <a:rPr sz="1100" b="0">
+                          <a:solidFill>
+                            <a:srgbClr val="535C6A"/>
+                          </a:solidFill>
+                          <a:latin typeface="Segoe UI"/>
+                        </a:rPr>
+                        <a:t>count</a:t>
+                      </a:r>
+                    </a:p>
+                  </a:txBody>
+                  <a:tcPr anchor="ctr" marL="82296" marR="54864" marT="18288" marB="18288">
+                    <a:solidFill>
+                      <a:srgbClr val="FFFFFF"/>
+                    </a:solidFill>
+                  </a:tcPr>
+                </a:tc>
+              </a:tr>
+              <a:tr h="347472">
+                <a:tc>
+                  <a:txBody>
+                    <a:bodyPr wrap="square"/>
+                    <a:lstStyle/>
+                    <a:p>
+                      <a:r>
+                        <a:rPr sz="1100" b="1">
+                          <a:solidFill>
+                            <a:srgbClr val="1A1F27"/>
+                          </a:solidFill>
+                          <a:latin typeface="Segoe UI"/>
+                        </a:rPr>
+                        <a:t>right_of_sell_actuals</a:t>
+                      </a:r>
+                    </a:p>
+                  </a:txBody>
+                  <a:tcPr anchor="ctr" marL="82296" marR="54864" marT="18288" marB="18288">
+                    <a:solidFill>
+                      <a:srgbClr val="F7F9F8"/>
+                    </a:solidFill>
+                  </a:tcPr>
+                </a:tc>
+                <a:tc>
+                  <a:txBody>
+                    <a:bodyPr wrap="square"/>
+                    <a:lstStyle/>
+                    <a:p>
+                      <a:r>
+                        <a:rPr sz="1100" b="0">
+                          <a:solidFill>
+                            <a:srgbClr val="535C6A"/>
+                          </a:solidFill>
+                          <a:latin typeface="Segoe UI"/>
+                        </a:rPr>
+                        <a:t>Of those, sell attempts made</a:t>
+                      </a:r>
+                    </a:p>
+                  </a:txBody>
+                  <a:tcPr anchor="ctr" marL="82296" marR="54864" marT="18288" marB="18288">
+                    <a:solidFill>
+                      <a:srgbClr val="F7F9F8"/>
+                    </a:solidFill>
+                  </a:tcPr>
+                </a:tc>
+                <a:tc>
+                  <a:txBody>
+                    <a:bodyPr wrap="square"/>
+                    <a:lstStyle/>
+                    <a:p>
+                      <a:r>
+                        <a:rPr sz="1100" b="0">
+                          <a:solidFill>
+                            <a:srgbClr val="535C6A"/>
+                          </a:solidFill>
+                          <a:latin typeface="Segoe UI"/>
+                        </a:rPr>
+                        <a:t>count</a:t>
+                      </a:r>
+                    </a:p>
+                  </a:txBody>
+                  <a:tcPr anchor="ctr" marL="82296" marR="54864" marT="18288" marB="18288">
+                    <a:solidFill>
+                      <a:srgbClr val="F7F9F8"/>
+                    </a:solidFill>
+                  </a:tcPr>
+                </a:tc>
+              </a:tr>
+              <a:tr h="347472">
+                <a:tc>
+                  <a:txBody>
+                    <a:bodyPr wrap="square"/>
+                    <a:lstStyle/>
+                    <a:p>
+                      <a:r>
+                        <a:rPr sz="1100" b="1">
+                          <a:solidFill>
+                            <a:srgbClr val="1A1F27"/>
+                          </a:solidFill>
+                          <a:latin typeface="Segoe UI"/>
+                        </a:rPr>
+                        <a:t>sales_made</a:t>
+                      </a:r>
+                    </a:p>
+                  </a:txBody>
+                  <a:tcPr anchor="ctr" marL="82296" marR="54864" marT="18288" marB="18288">
+                    <a:solidFill>
+                      <a:srgbClr val="FFFFFF"/>
+                    </a:solidFill>
+                  </a:tcPr>
+                </a:tc>
+                <a:tc>
+                  <a:txBody>
+                    <a:bodyPr wrap="square"/>
+                    <a:lstStyle/>
+                    <a:p>
+                      <a:r>
+                        <a:rPr sz="1100" b="0">
+                          <a:solidFill>
+                            <a:srgbClr val="535C6A"/>
+                          </a:solidFill>
+                          <a:latin typeface="Segoe UI"/>
+                        </a:rPr>
+                        <a:t>Sales completed</a:t>
+                      </a:r>
+                    </a:p>
+                  </a:txBody>
+                  <a:tcPr anchor="ctr" marL="82296" marR="54864" marT="18288" marB="18288">
+                    <a:solidFill>
+                      <a:srgbClr val="FFFFFF"/>
+                    </a:solidFill>
+                  </a:tcPr>
+                </a:tc>
+                <a:tc>
+                  <a:txBody>
+                    <a:bodyPr wrap="square"/>
+                    <a:lstStyle/>
+                    <a:p>
+                      <a:r>
+                        <a:rPr sz="1100" b="0">
+                          <a:solidFill>
+                            <a:srgbClr val="535C6A"/>
+                          </a:solidFill>
+                          <a:latin typeface="Segoe UI"/>
+                        </a:rPr>
+                        <a:t>count</a:t>
+                      </a:r>
+                    </a:p>
+                  </a:txBody>
+                  <a:tcPr anchor="ctr" marL="82296" marR="54864" marT="18288" marB="18288">
+                    <a:solidFill>
+                      <a:srgbClr val="FFFFFF"/>
+                    </a:solidFill>
+                  </a:tcPr>
+                </a:tc>
+              </a:tr>
+              <a:tr h="347472">
+                <a:tc>
+                  <a:txBody>
+                    <a:bodyPr wrap="square"/>
+                    <a:lstStyle/>
+                    <a:p>
+                      <a:r>
+                        <a:rPr sz="1100" b="1">
+                          <a:solidFill>
+                            <a:srgbClr val="1A1F27"/>
+                          </a:solidFill>
+                          <a:latin typeface="Segoe UI"/>
+                        </a:rPr>
+                        <a:t>new_prospects</a:t>
+                      </a:r>
+                    </a:p>
+                  </a:txBody>
+                  <a:tcPr anchor="ctr" marL="82296" marR="54864" marT="18288" marB="18288">
+                    <a:solidFill>
+                      <a:srgbClr val="F7F9F8"/>
+                    </a:solidFill>
+                  </a:tcPr>
+                </a:tc>
+                <a:tc>
+                  <a:txBody>
+                    <a:bodyPr wrap="square"/>
+                    <a:lstStyle/>
+                    <a:p>
+                      <a:r>
+                        <a:rPr sz="1100" b="0">
+                          <a:solidFill>
+                            <a:srgbClr val="535C6A"/>
+                          </a:solidFill>
+                          <a:latin typeface="Segoe UI"/>
+                        </a:rPr>
+                        <a:t>New leads identified</a:t>
+                      </a:r>
+                    </a:p>
+                  </a:txBody>
+                  <a:tcPr anchor="ctr" marL="82296" marR="54864" marT="18288" marB="18288">
+                    <a:solidFill>
+                      <a:srgbClr val="F7F9F8"/>
+                    </a:solidFill>
+                  </a:tcPr>
+                </a:tc>
+                <a:tc>
+                  <a:txBody>
+                    <a:bodyPr wrap="square"/>
+                    <a:lstStyle/>
+                    <a:p>
+                      <a:r>
+                        <a:rPr sz="1100" b="0">
+                          <a:solidFill>
+                            <a:srgbClr val="535C6A"/>
+                          </a:solidFill>
+                          <a:latin typeface="Segoe UI"/>
+                        </a:rPr>
+                        <a:t>count</a:t>
+                      </a:r>
+                    </a:p>
+                  </a:txBody>
+                  <a:tcPr anchor="ctr" marL="82296" marR="54864" marT="18288" marB="18288">
+                    <a:solidFill>
+                      <a:srgbClr val="F7F9F8"/>
+                    </a:solidFill>
+                  </a:tcPr>
+                </a:tc>
+              </a:tr>
+              <a:tr h="347472">
+                <a:tc>
+                  <a:txBody>
+                    <a:bodyPr wrap="square"/>
+                    <a:lstStyle/>
+                    <a:p>
+                      <a:r>
+                        <a:rPr sz="1100" b="1">
+                          <a:solidFill>
+                            <a:srgbClr val="1A1F27"/>
+                          </a:solidFill>
+                          <a:latin typeface="Segoe UI"/>
+                        </a:rPr>
+                        <a:t>new_prospects_converted</a:t>
+                      </a:r>
+                    </a:p>
+                  </a:txBody>
+                  <a:tcPr anchor="ctr" marL="82296" marR="54864" marT="18288" marB="18288">
+                    <a:solidFill>
+                      <a:srgbClr val="FFFFFF"/>
+                    </a:solidFill>
+                  </a:tcPr>
+                </a:tc>
+                <a:tc>
+                  <a:txBody>
+                    <a:bodyPr wrap="square"/>
+                    <a:lstStyle/>
+                    <a:p>
+                      <a:r>
+                        <a:rPr sz="1100" b="0">
+                          <a:solidFill>
+                            <a:srgbClr val="535C6A"/>
+                          </a:solidFill>
+                          <a:latin typeface="Segoe UI"/>
+                        </a:rPr>
+                        <a:t>Leads converted</a:t>
+                      </a:r>
+                    </a:p>
+                  </a:txBody>
+                  <a:tcPr anchor="ctr" marL="82296" marR="54864" marT="18288" marB="18288">
+                    <a:solidFill>
+                      <a:srgbClr val="FFFFFF"/>
+                    </a:solidFill>
+                  </a:tcPr>
+                </a:tc>
+                <a:tc>
+                  <a:txBody>
+                    <a:bodyPr wrap="square"/>
+                    <a:lstStyle/>
+                    <a:p>
+                      <a:r>
+                        <a:rPr sz="1100" b="0">
+                          <a:solidFill>
+                            <a:srgbClr val="535C6A"/>
+                          </a:solidFill>
+                          <a:latin typeface="Segoe UI"/>
+                        </a:rPr>
+                        <a:t>count</a:t>
+                      </a:r>
+                    </a:p>
+                  </a:txBody>
+                  <a:tcPr anchor="ctr" marL="82296" marR="54864" marT="18288" marB="18288">
+                    <a:solidFill>
+                      <a:srgbClr val="FFFFFF"/>
+                    </a:solidFill>
+                  </a:tcPr>
+                </a:tc>
+              </a:tr>
+              <a:tr h="347472">
+                <a:tc>
+                  <a:txBody>
+                    <a:bodyPr wrap="square"/>
+                    <a:lstStyle/>
+                    <a:p>
+                      <a:r>
+                        <a:rPr sz="1100" b="1">
+                          <a:solidFill>
+                            <a:srgbClr val="1A1F27"/>
+                          </a:solidFill>
+                          <a:latin typeface="Segoe UI"/>
+                        </a:rPr>
+                        <a:t>escalations</a:t>
+                      </a:r>
+                    </a:p>
+                  </a:txBody>
+                  <a:tcPr anchor="ctr" marL="82296" marR="54864" marT="18288" marB="18288">
+                    <a:solidFill>
+                      <a:srgbClr val="F7F9F8"/>
+                    </a:solidFill>
+                  </a:tcPr>
+                </a:tc>
+                <a:tc>
+                  <a:txBody>
+                    <a:bodyPr wrap="square"/>
+                    <a:lstStyle/>
+                    <a:p>
+                      <a:r>
+                        <a:rPr sz="1100" b="0">
+                          <a:solidFill>
+                            <a:srgbClr val="535C6A"/>
+                          </a:solidFill>
+                          <a:latin typeface="Segoe UI"/>
+                        </a:rPr>
+                        <a:t>Calls with an escalation</a:t>
+                      </a:r>
+                    </a:p>
+                  </a:txBody>
+                  <a:tcPr anchor="ctr" marL="82296" marR="54864" marT="18288" marB="18288">
+                    <a:solidFill>
+                      <a:srgbClr val="F7F9F8"/>
+                    </a:solidFill>
+                  </a:tcPr>
+                </a:tc>
+                <a:tc>
+                  <a:txBody>
+                    <a:bodyPr wrap="square"/>
+                    <a:lstStyle/>
+                    <a:p>
+                      <a:r>
+                        <a:rPr sz="1100" b="0">
+                          <a:solidFill>
+                            <a:srgbClr val="535C6A"/>
+                          </a:solidFill>
+                          <a:latin typeface="Segoe UI"/>
+                        </a:rPr>
+                        <a:t>count</a:t>
+                      </a:r>
+                    </a:p>
+                  </a:txBody>
+                  <a:tcPr anchor="ctr" marL="82296" marR="54864" marT="18288" marB="18288">
+                    <a:solidFill>
+                      <a:srgbClr val="F7F9F8"/>
+                    </a:solidFill>
+                  </a:tcPr>
+                </a:tc>
+              </a:tr>
+              <a:tr h="347472">
+                <a:tc>
+                  <a:txBody>
+                    <a:bodyPr wrap="square"/>
+                    <a:lstStyle/>
+                    <a:p>
+                      <a:r>
+                        <a:rPr sz="1100" b="1">
+                          <a:solidFill>
+                            <a:srgbClr val="1A1F27"/>
+                          </a:solidFill>
+                          <a:latin typeface="Segoe UI"/>
+                        </a:rPr>
+                        <a:t>customer_experience</a:t>
+                      </a:r>
+                    </a:p>
+                  </a:txBody>
+                  <a:tcPr anchor="ctr" marL="82296" marR="54864" marT="18288" marB="18288">
+                    <a:solidFill>
+                      <a:srgbClr val="FFFFFF"/>
+                    </a:solidFill>
+                  </a:tcPr>
+                </a:tc>
+                <a:tc>
+                  <a:txBody>
+                    <a:bodyPr wrap="square"/>
+                    <a:lstStyle/>
+                    <a:p>
+                      <a:r>
+                        <a:rPr sz="1100" b="0">
+                          <a:solidFill>
+                            <a:srgbClr val="535C6A"/>
+                          </a:solidFill>
+                          <a:latin typeface="Segoe UI"/>
+                        </a:rPr>
+                        <a:t>Rated calls not rated “Poor”</a:t>
+                      </a:r>
+                    </a:p>
+                  </a:txBody>
+                  <a:tcPr anchor="ctr" marL="82296" marR="54864" marT="18288" marB="18288">
+                    <a:solidFill>
+                      <a:srgbClr val="FFFFFF"/>
+                    </a:solidFill>
+                  </a:tcPr>
+                </a:tc>
+                <a:tc>
+                  <a:txBody>
+                    <a:bodyPr wrap="square"/>
+                    <a:lstStyle/>
+                    <a:p>
+                      <a:r>
+                        <a:rPr sz="1100" b="0">
+                          <a:solidFill>
+                            <a:srgbClr val="535C6A"/>
+                          </a:solidFill>
+                          <a:latin typeface="Segoe UI"/>
+                        </a:rPr>
+                        <a:t>rate</a:t>
+                      </a:r>
+                    </a:p>
+                  </a:txBody>
+                  <a:tcPr anchor="ctr" marL="82296" marR="54864" marT="18288" marB="18288">
+                    <a:solidFill>
+                      <a:srgbClr val="FFFFFF"/>
+                    </a:solidFill>
+                  </a:tcPr>
+                </a:tc>
+              </a:tr>
+            </a:tbl>
+          </a:graphicData>
+        </a:graphic>
+      </p:graphicFrame>
     </p:spTree>
   </p:cSld>
   <p:clrMapOvr>
@@ -4193,7 +6107,7 @@
             <a:avLst/>
           </a:prstGeom>
           <a:solidFill>
-            <a:srgbClr val="A96E12"/>
+            <a:srgbClr val="0E7C74"/>
           </a:solidFill>
           <a:ln>
             <a:noFill/>
@@ -4229,8 +6143,8 @@
         </p:nvSpPr>
         <p:spPr>
           <a:xfrm>
-            <a:off x="640080" y="457200"/>
-            <a:ext cx="10972800" cy="1371600"/>
+            <a:off x="640080" y="384048"/>
+            <a:ext cx="11155680" cy="1280160"/>
           </a:xfrm>
           <a:prstGeom prst="rect">
             <a:avLst/>
@@ -4245,17 +6159,17 @@
           <a:p>
             <a:pPr>
               <a:spcAft>
-                <a:spcPts val="600"/>
+                <a:spcPts val="500"/>
               </a:spcAft>
             </a:pPr>
             <a:r>
               <a:rPr sz="1250" b="1">
                 <a:solidFill>
-                  <a:srgbClr val="A96E12"/>
+                  <a:srgbClr val="0E7C74"/>
                 </a:solidFill>
                 <a:latin typeface="Segoe UI"/>
               </a:rPr>
-              <a:t>WHAT WE NEED</a:t>
+              <a:t>KPIS · PSO (24)</a:t>
             </a:r>
           </a:p>
           <a:p>
@@ -4265,104 +6179,588 @@
               </a:spcAft>
             </a:pPr>
             <a:r>
-              <a:rPr sz="3000" b="1">
+              <a:rPr sz="2700" b="1">
                 <a:solidFill>
                   <a:srgbClr val="1A1F27"/>
                 </a:solidFill>
                 <a:latin typeface="Segoe UI"/>
               </a:rPr>
-              <a:t>To make the metrics trustworthy end-to-end</a:t>
+              <a:t>Care — VZ Mobile (grouped)</a:t>
             </a:r>
           </a:p>
         </p:txBody>
       </p:sp>
-      <p:sp>
-        <p:nvSpPr>
-          <p:cNvPr id="4" name="TextBox 3"/>
-          <p:cNvSpPr txBox="1"/>
+      <p:graphicFrame>
+        <p:nvGraphicFramePr>
+          <p:cNvPr id="4" name="Table 3"/>
+          <p:cNvGraphicFramePr>
+            <a:graphicFrameLocks noGrp="1"/>
+          </p:cNvGraphicFramePr>
           <p:nvPr/>
-        </p:nvSpPr>
-        <p:spPr>
-          <a:xfrm>
-            <a:off x="685800" y="1965960"/>
-            <a:ext cx="10881360" cy="4297680"/>
-          </a:xfrm>
-          <a:prstGeom prst="rect">
-            <a:avLst/>
-          </a:prstGeom>
-          <a:noFill/>
-        </p:spPr>
-        <p:txBody>
-          <a:bodyPr wrap="square">
-            <a:spAutoFit/>
-          </a:bodyPr>
-          <a:lstStyle/>
-          <a:p>
-            <a:pPr>
-              <a:spcAft>
-                <a:spcPts val="1800"/>
-              </a:spcAft>
-            </a:pPr>
-            <a:r>
-              <a:rPr sz="1800" b="0">
-                <a:solidFill>
-                  <a:srgbClr val="1A1F27"/>
-                </a:solidFill>
-                <a:latin typeface="Segoe UI"/>
-              </a:rPr>
-              <a:t>Golden data — a set of calls with business-certified correct answers to evaluate against.</a:t>
-            </a:r>
-          </a:p>
-          <a:p>
-            <a:pPr>
-              <a:spcAft>
-                <a:spcPts val="1800"/>
-              </a:spcAft>
-            </a:pPr>
-            <a:r>
-              <a:rPr sz="1800" b="0">
-                <a:solidFill>
-                  <a:srgbClr val="1A1F27"/>
-                </a:solidFill>
-                <a:latin typeface="Segoe UI"/>
-              </a:rPr>
-              <a:t>Manager roll-up score — re-specify per program (today it is tuned for sales only).</a:t>
-            </a:r>
-          </a:p>
-          <a:p>
-            <a:pPr>
-              <a:spcAft>
-                <a:spcPts val="1800"/>
-              </a:spcAft>
-            </a:pPr>
-            <a:r>
-              <a:rPr sz="1800" b="0">
-                <a:solidFill>
-                  <a:srgbClr val="1A1F27"/>
-                </a:solidFill>
-                <a:latin typeface="Segoe UI"/>
-              </a:rPr>
-              <a:t>WCC alignment — align the prompt &amp; coaching narrative to the care scorecard.</a:t>
-            </a:r>
-          </a:p>
-          <a:p>
-            <a:pPr>
-              <a:spcAft>
-                <a:spcPts val="1800"/>
-              </a:spcAft>
-            </a:pPr>
-            <a:r>
-              <a:rPr sz="1800" b="0">
-                <a:solidFill>
-                  <a:srgbClr val="1A1F27"/>
-                </a:solidFill>
-                <a:latin typeface="Segoe UI"/>
-              </a:rPr>
-              <a:t>Acceptance thresholds — what value counts as “good” for each KPI.</a:t>
-            </a:r>
-          </a:p>
-        </p:txBody>
-      </p:sp>
+        </p:nvGraphicFramePr>
+        <p:xfrm>
+          <a:off x="640080" y="1783080"/>
+          <a:ext cx="10927080" cy="4389120"/>
+        </p:xfrm>
+        <a:graphic>
+          <a:graphicData uri="http://schemas.openxmlformats.org/drawingml/2006/table">
+            <a:tbl>
+              <a:tblPr firstRow="1">
+                <a:tableStyleId>{5C22544A-7EE6-4342-B048-85BDC9FD1C3A}</a:tableStyleId>
+              </a:tblPr>
+              <a:tblGrid>
+                <a:gridCol w="2286000"/>
+                <a:gridCol w="7360920"/>
+                <a:gridCol w="1280160"/>
+              </a:tblGrid>
+              <a:tr h="548640">
+                <a:tc>
+                  <a:txBody>
+                    <a:bodyPr wrap="square"/>
+                    <a:lstStyle/>
+                    <a:p>
+                      <a:r>
+                        <a:rPr sz="1100" b="1">
+                          <a:solidFill>
+                            <a:srgbClr val="FFFFFF"/>
+                          </a:solidFill>
+                          <a:latin typeface="Segoe UI"/>
+                        </a:rPr>
+                        <a:t>Group</a:t>
+                      </a:r>
+                    </a:p>
+                  </a:txBody>
+                  <a:tcPr anchor="ctr" marL="82296" marR="54864" marT="18288" marB="18288">
+                    <a:solidFill>
+                      <a:srgbClr val="0E7C74"/>
+                    </a:solidFill>
+                  </a:tcPr>
+                </a:tc>
+                <a:tc>
+                  <a:txBody>
+                    <a:bodyPr wrap="square"/>
+                    <a:lstStyle/>
+                    <a:p>
+                      <a:r>
+                        <a:rPr sz="1100" b="1">
+                          <a:solidFill>
+                            <a:srgbClr val="FFFFFF"/>
+                          </a:solidFill>
+                          <a:latin typeface="Segoe UI"/>
+                        </a:rPr>
+                        <a:t>KPIs in the group</a:t>
+                      </a:r>
+                    </a:p>
+                  </a:txBody>
+                  <a:tcPr anchor="ctr" marL="82296" marR="54864" marT="18288" marB="18288">
+                    <a:solidFill>
+                      <a:srgbClr val="0E7C74"/>
+                    </a:solidFill>
+                  </a:tcPr>
+                </a:tc>
+                <a:tc>
+                  <a:txBody>
+                    <a:bodyPr wrap="square"/>
+                    <a:lstStyle/>
+                    <a:p>
+                      <a:r>
+                        <a:rPr sz="1100" b="1">
+                          <a:solidFill>
+                            <a:srgbClr val="FFFFFF"/>
+                          </a:solidFill>
+                          <a:latin typeface="Segoe UI"/>
+                        </a:rPr>
+                        <a:t>Unit</a:t>
+                      </a:r>
+                    </a:p>
+                  </a:txBody>
+                  <a:tcPr anchor="ctr" marL="82296" marR="54864" marT="18288" marB="18288">
+                    <a:solidFill>
+                      <a:srgbClr val="0E7C74"/>
+                    </a:solidFill>
+                  </a:tcPr>
+                </a:tc>
+              </a:tr>
+              <a:tr h="548640">
+                <a:tc>
+                  <a:txBody>
+                    <a:bodyPr wrap="square"/>
+                    <a:lstStyle/>
+                    <a:p>
+                      <a:r>
+                        <a:rPr sz="1150" b="1">
+                          <a:solidFill>
+                            <a:srgbClr val="1A1F27"/>
+                          </a:solidFill>
+                          <a:latin typeface="Segoe UI"/>
+                        </a:rPr>
+                        <a:t>Customer Experience</a:t>
+                      </a:r>
+                    </a:p>
+                  </a:txBody>
+                  <a:tcPr anchor="ctr" marL="82296" marR="54864" marT="18288" marB="18288">
+                    <a:solidFill>
+                      <a:srgbClr val="FFFFFF"/>
+                    </a:solidFill>
+                  </a:tcPr>
+                </a:tc>
+                <a:tc>
+                  <a:txBody>
+                    <a:bodyPr wrap="square"/>
+                    <a:lstStyle/>
+                    <a:p>
+                      <a:r>
+                        <a:rPr sz="1150" b="0">
+                          <a:solidFill>
+                            <a:srgbClr val="535C6A"/>
+                          </a:solidFill>
+                          <a:latin typeface="Segoe UI"/>
+                        </a:rPr>
+                        <a:t>Predicted CSAT · Customer confidence · Customer effort</a:t>
+                      </a:r>
+                    </a:p>
+                  </a:txBody>
+                  <a:tcPr anchor="ctr" marL="82296" marR="54864" marT="18288" marB="18288">
+                    <a:solidFill>
+                      <a:srgbClr val="FFFFFF"/>
+                    </a:solidFill>
+                  </a:tcPr>
+                </a:tc>
+                <a:tc>
+                  <a:txBody>
+                    <a:bodyPr wrap="square"/>
+                    <a:lstStyle/>
+                    <a:p>
+                      <a:r>
+                        <a:rPr sz="1150" b="0">
+                          <a:solidFill>
+                            <a:srgbClr val="535C6A"/>
+                          </a:solidFill>
+                          <a:latin typeface="Segoe UI"/>
+                        </a:rPr>
+                        <a:t>rate</a:t>
+                      </a:r>
+                    </a:p>
+                  </a:txBody>
+                  <a:tcPr anchor="ctr" marL="82296" marR="54864" marT="18288" marB="18288">
+                    <a:solidFill>
+                      <a:srgbClr val="FFFFFF"/>
+                    </a:solidFill>
+                  </a:tcPr>
+                </a:tc>
+              </a:tr>
+              <a:tr h="548640">
+                <a:tc>
+                  <a:txBody>
+                    <a:bodyPr wrap="square"/>
+                    <a:lstStyle/>
+                    <a:p>
+                      <a:r>
+                        <a:rPr sz="1150" b="1">
+                          <a:solidFill>
+                            <a:srgbClr val="1A1F27"/>
+                          </a:solidFill>
+                          <a:latin typeface="Segoe UI"/>
+                        </a:rPr>
+                        <a:t>Resolve</a:t>
+                      </a:r>
+                    </a:p>
+                  </a:txBody>
+                  <a:tcPr anchor="ctr" marL="82296" marR="54864" marT="18288" marB="18288">
+                    <a:solidFill>
+                      <a:srgbClr val="F7F9F8"/>
+                    </a:solidFill>
+                  </a:tcPr>
+                </a:tc>
+                <a:tc>
+                  <a:txBody>
+                    <a:bodyPr wrap="square"/>
+                    <a:lstStyle/>
+                    <a:p>
+                      <a:r>
+                        <a:rPr sz="1150" b="0">
+                          <a:solidFill>
+                            <a:srgbClr val="535C6A"/>
+                          </a:solidFill>
+                          <a:latin typeface="Segoe UI"/>
+                        </a:rPr>
+                        <a:t>FCR likelihood · Resolution completeness · Resolution confidence · Next-steps clarity · Issue-resolution effectiveness</a:t>
+                      </a:r>
+                    </a:p>
+                  </a:txBody>
+                  <a:tcPr anchor="ctr" marL="82296" marR="54864" marT="18288" marB="18288">
+                    <a:solidFill>
+                      <a:srgbClr val="F7F9F8"/>
+                    </a:solidFill>
+                  </a:tcPr>
+                </a:tc>
+                <a:tc>
+                  <a:txBody>
+                    <a:bodyPr wrap="square"/>
+                    <a:lstStyle/>
+                    <a:p>
+                      <a:r>
+                        <a:rPr sz="1150" b="0">
+                          <a:solidFill>
+                            <a:srgbClr val="535C6A"/>
+                          </a:solidFill>
+                          <a:latin typeface="Segoe UI"/>
+                        </a:rPr>
+                        <a:t>rate</a:t>
+                      </a:r>
+                    </a:p>
+                  </a:txBody>
+                  <a:tcPr anchor="ctr" marL="82296" marR="54864" marT="18288" marB="18288">
+                    <a:solidFill>
+                      <a:srgbClr val="F7F9F8"/>
+                    </a:solidFill>
+                  </a:tcPr>
+                </a:tc>
+              </a:tr>
+              <a:tr h="548640">
+                <a:tc>
+                  <a:txBody>
+                    <a:bodyPr wrap="square"/>
+                    <a:lstStyle/>
+                    <a:p>
+                      <a:r>
+                        <a:rPr sz="1150" b="1">
+                          <a:solidFill>
+                            <a:srgbClr val="1A1F27"/>
+                          </a:solidFill>
+                          <a:latin typeface="Segoe UI"/>
+                        </a:rPr>
+                        <a:t>Quality</a:t>
+                      </a:r>
+                    </a:p>
+                  </a:txBody>
+                  <a:tcPr anchor="ctr" marL="82296" marR="54864" marT="18288" marB="18288">
+                    <a:solidFill>
+                      <a:srgbClr val="FFFFFF"/>
+                    </a:solidFill>
+                  </a:tcPr>
+                </a:tc>
+                <a:tc>
+                  <a:txBody>
+                    <a:bodyPr wrap="square"/>
+                    <a:lstStyle/>
+                    <a:p>
+                      <a:r>
+                        <a:rPr sz="1150" b="0">
+                          <a:solidFill>
+                            <a:srgbClr val="535C6A"/>
+                          </a:solidFill>
+                          <a:latin typeface="Segoe UI"/>
+                        </a:rPr>
+                        <a:t>Quality · Compliance · Process adherence</a:t>
+                      </a:r>
+                    </a:p>
+                  </a:txBody>
+                  <a:tcPr anchor="ctr" marL="82296" marR="54864" marT="18288" marB="18288">
+                    <a:solidFill>
+                      <a:srgbClr val="FFFFFF"/>
+                    </a:solidFill>
+                  </a:tcPr>
+                </a:tc>
+                <a:tc>
+                  <a:txBody>
+                    <a:bodyPr wrap="square"/>
+                    <a:lstStyle/>
+                    <a:p>
+                      <a:r>
+                        <a:rPr sz="1150" b="0">
+                          <a:solidFill>
+                            <a:srgbClr val="535C6A"/>
+                          </a:solidFill>
+                          <a:latin typeface="Segoe UI"/>
+                        </a:rPr>
+                        <a:t>rate</a:t>
+                      </a:r>
+                    </a:p>
+                  </a:txBody>
+                  <a:tcPr anchor="ctr" marL="82296" marR="54864" marT="18288" marB="18288">
+                    <a:solidFill>
+                      <a:srgbClr val="FFFFFF"/>
+                    </a:solidFill>
+                  </a:tcPr>
+                </a:tc>
+              </a:tr>
+              <a:tr h="548640">
+                <a:tc>
+                  <a:txBody>
+                    <a:bodyPr wrap="square"/>
+                    <a:lstStyle/>
+                    <a:p>
+                      <a:r>
+                        <a:rPr sz="1150" b="1">
+                          <a:solidFill>
+                            <a:srgbClr val="1A1F27"/>
+                          </a:solidFill>
+                          <a:latin typeface="Segoe UI"/>
+                        </a:rPr>
+                        <a:t>Care Handling</a:t>
+                      </a:r>
+                    </a:p>
+                  </a:txBody>
+                  <a:tcPr anchor="ctr" marL="82296" marR="54864" marT="18288" marB="18288">
+                    <a:solidFill>
+                      <a:srgbClr val="F7F9F8"/>
+                    </a:solidFill>
+                  </a:tcPr>
+                </a:tc>
+                <a:tc>
+                  <a:txBody>
+                    <a:bodyPr wrap="square"/>
+                    <a:lstStyle/>
+                    <a:p>
+                      <a:r>
+                        <a:rPr sz="1150" b="0">
+                          <a:solidFill>
+                            <a:srgbClr val="535C6A"/>
+                          </a:solidFill>
+                          <a:latin typeface="Segoe UI"/>
+                        </a:rPr>
+                        <a:t>Issue ownership · Escalation necessity · Transfer avoidance · Case management</a:t>
+                      </a:r>
+                    </a:p>
+                  </a:txBody>
+                  <a:tcPr anchor="ctr" marL="82296" marR="54864" marT="18288" marB="18288">
+                    <a:solidFill>
+                      <a:srgbClr val="F7F9F8"/>
+                    </a:solidFill>
+                  </a:tcPr>
+                </a:tc>
+                <a:tc>
+                  <a:txBody>
+                    <a:bodyPr wrap="square"/>
+                    <a:lstStyle/>
+                    <a:p>
+                      <a:r>
+                        <a:rPr sz="1150" b="0">
+                          <a:solidFill>
+                            <a:srgbClr val="535C6A"/>
+                          </a:solidFill>
+                          <a:latin typeface="Segoe UI"/>
+                        </a:rPr>
+                        <a:t>rate</a:t>
+                      </a:r>
+                    </a:p>
+                  </a:txBody>
+                  <a:tcPr anchor="ctr" marL="82296" marR="54864" marT="18288" marB="18288">
+                    <a:solidFill>
+                      <a:srgbClr val="F7F9F8"/>
+                    </a:solidFill>
+                  </a:tcPr>
+                </a:tc>
+              </a:tr>
+              <a:tr h="548640">
+                <a:tc>
+                  <a:txBody>
+                    <a:bodyPr wrap="square"/>
+                    <a:lstStyle/>
+                    <a:p>
+                      <a:r>
+                        <a:rPr sz="1150" b="1">
+                          <a:solidFill>
+                            <a:srgbClr val="1A1F27"/>
+                          </a:solidFill>
+                          <a:latin typeface="Segoe UI"/>
+                        </a:rPr>
+                        <a:t>Operational Efficiency</a:t>
+                      </a:r>
+                    </a:p>
+                  </a:txBody>
+                  <a:tcPr anchor="ctr" marL="82296" marR="54864" marT="18288" marB="18288">
+                    <a:solidFill>
+                      <a:srgbClr val="FFFFFF"/>
+                    </a:solidFill>
+                  </a:tcPr>
+                </a:tc>
+                <a:tc>
+                  <a:txBody>
+                    <a:bodyPr wrap="square"/>
+                    <a:lstStyle/>
+                    <a:p>
+                      <a:r>
+                        <a:rPr sz="1150" b="0">
+                          <a:solidFill>
+                            <a:srgbClr val="535C6A"/>
+                          </a:solidFill>
+                          <a:latin typeface="Segoe UI"/>
+                        </a:rPr>
+                        <a:t>AHT assessment · Contact-handling efficiency · Hold management</a:t>
+                      </a:r>
+                    </a:p>
+                  </a:txBody>
+                  <a:tcPr anchor="ctr" marL="82296" marR="54864" marT="18288" marB="18288">
+                    <a:solidFill>
+                      <a:srgbClr val="FFFFFF"/>
+                    </a:solidFill>
+                  </a:tcPr>
+                </a:tc>
+                <a:tc>
+                  <a:txBody>
+                    <a:bodyPr wrap="square"/>
+                    <a:lstStyle/>
+                    <a:p>
+                      <a:r>
+                        <a:rPr sz="1150" b="0">
+                          <a:solidFill>
+                            <a:srgbClr val="535C6A"/>
+                          </a:solidFill>
+                          <a:latin typeface="Segoe UI"/>
+                        </a:rPr>
+                        <a:t>rate</a:t>
+                      </a:r>
+                    </a:p>
+                  </a:txBody>
+                  <a:tcPr anchor="ctr" marL="82296" marR="54864" marT="18288" marB="18288">
+                    <a:solidFill>
+                      <a:srgbClr val="FFFFFF"/>
+                    </a:solidFill>
+                  </a:tcPr>
+                </a:tc>
+              </a:tr>
+              <a:tr h="548640">
+                <a:tc>
+                  <a:txBody>
+                    <a:bodyPr wrap="square"/>
+                    <a:lstStyle/>
+                    <a:p>
+                      <a:r>
+                        <a:rPr sz="1150" b="1">
+                          <a:solidFill>
+                            <a:srgbClr val="1A1F27"/>
+                          </a:solidFill>
+                          <a:latin typeface="Segoe UI"/>
+                        </a:rPr>
+                        <a:t>Repeat-Contact Risk</a:t>
+                      </a:r>
+                    </a:p>
+                  </a:txBody>
+                  <a:tcPr anchor="ctr" marL="82296" marR="54864" marT="18288" marB="18288">
+                    <a:solidFill>
+                      <a:srgbClr val="F7F9F8"/>
+                    </a:solidFill>
+                  </a:tcPr>
+                </a:tc>
+                <a:tc>
+                  <a:txBody>
+                    <a:bodyPr wrap="square"/>
+                    <a:lstStyle/>
+                    <a:p>
+                      <a:r>
+                        <a:rPr sz="1150" b="0">
+                          <a:solidFill>
+                            <a:srgbClr val="535C6A"/>
+                          </a:solidFill>
+                          <a:latin typeface="Segoe UI"/>
+                        </a:rPr>
+                        <a:t>Repeat-contact · Escalation · Callback · Reopen risk</a:t>
+                      </a:r>
+                    </a:p>
+                  </a:txBody>
+                  <a:tcPr anchor="ctr" marL="82296" marR="54864" marT="18288" marB="18288">
+                    <a:solidFill>
+                      <a:srgbClr val="F7F9F8"/>
+                    </a:solidFill>
+                  </a:tcPr>
+                </a:tc>
+                <a:tc>
+                  <a:txBody>
+                    <a:bodyPr wrap="square"/>
+                    <a:lstStyle/>
+                    <a:p>
+                      <a:r>
+                        <a:rPr sz="1150" b="0">
+                          <a:solidFill>
+                            <a:srgbClr val="535C6A"/>
+                          </a:solidFill>
+                          <a:latin typeface="Segoe UI"/>
+                        </a:rPr>
+                        <a:t>count</a:t>
+                      </a:r>
+                    </a:p>
+                  </a:txBody>
+                  <a:tcPr anchor="ctr" marL="82296" marR="54864" marT="18288" marB="18288">
+                    <a:solidFill>
+                      <a:srgbClr val="F7F9F8"/>
+                    </a:solidFill>
+                  </a:tcPr>
+                </a:tc>
+              </a:tr>
+              <a:tr h="548640">
+                <a:tc>
+                  <a:txBody>
+                    <a:bodyPr wrap="square"/>
+                    <a:lstStyle/>
+                    <a:p>
+                      <a:r>
+                        <a:rPr sz="1150" b="1">
+                          <a:solidFill>
+                            <a:srgbClr val="1A1F27"/>
+                          </a:solidFill>
+                          <a:latin typeface="Segoe UI"/>
+                        </a:rPr>
+                        <a:t>Customer</a:t>
+                      </a:r>
+                    </a:p>
+                  </a:txBody>
+                  <a:tcPr anchor="ctr" marL="82296" marR="54864" marT="18288" marB="18288">
+                    <a:solidFill>
+                      <a:srgbClr val="FFFFFF"/>
+                    </a:solidFill>
+                  </a:tcPr>
+                </a:tc>
+                <a:tc>
+                  <a:txBody>
+                    <a:bodyPr wrap="square"/>
+                    <a:lstStyle/>
+                    <a:p>
+                      <a:r>
+                        <a:rPr sz="1150" b="0">
+                          <a:solidFill>
+                            <a:srgbClr val="535C6A"/>
+                          </a:solidFill>
+                          <a:latin typeface="Segoe UI"/>
+                        </a:rPr>
+                        <a:t>Escalations · Customer experience</a:t>
+                      </a:r>
+                    </a:p>
+                  </a:txBody>
+                  <a:tcPr anchor="ctr" marL="82296" marR="54864" marT="18288" marB="18288">
+                    <a:solidFill>
+                      <a:srgbClr val="FFFFFF"/>
+                    </a:solidFill>
+                  </a:tcPr>
+                </a:tc>
+                <a:tc>
+                  <a:txBody>
+                    <a:bodyPr wrap="square"/>
+                    <a:lstStyle/>
+                    <a:p>
+                      <a:r>
+                        <a:rPr sz="1150" b="0">
+                          <a:solidFill>
+                            <a:srgbClr val="535C6A"/>
+                          </a:solidFill>
+                          <a:latin typeface="Segoe UI"/>
+                        </a:rPr>
+                        <a:t>count / rate</a:t>
+                      </a:r>
+                    </a:p>
+                  </a:txBody>
+                  <a:tcPr anchor="ctr" marL="82296" marR="54864" marT="18288" marB="18288">
+                    <a:solidFill>
+                      <a:srgbClr val="FFFFFF"/>
+                    </a:solidFill>
+                  </a:tcPr>
+                </a:tc>
+              </a:tr>
+            </a:tbl>
+          </a:graphicData>
+        </a:graphic>
+      </p:graphicFrame>
     </p:spTree>
   </p:cSld>
   <p:clrMapOvr>
@@ -4440,8 +6838,8 @@
         </p:nvSpPr>
         <p:spPr>
           <a:xfrm>
-            <a:off x="640080" y="457200"/>
-            <a:ext cx="10972800" cy="1371600"/>
+            <a:off x="640080" y="384048"/>
+            <a:ext cx="11155680" cy="1280160"/>
           </a:xfrm>
           <a:prstGeom prst="rect">
             <a:avLst/>
@@ -4456,7 +6854,7 @@
           <a:p>
             <a:pPr>
               <a:spcAft>
-                <a:spcPts val="600"/>
+                <a:spcPts val="500"/>
               </a:spcAft>
             </a:pPr>
             <a:r>
@@ -4466,7 +6864,7 @@
                 </a:solidFill>
                 <a:latin typeface="Segoe UI"/>
               </a:rPr>
-              <a:t>WHAT WE ASK THE BUSINESS</a:t>
+              <a:t>GOLDEN DATA · WHAT WE NEED TO HOLD</a:t>
             </a:r>
           </a:p>
           <a:p>
@@ -4476,27 +6874,616 @@
               </a:spcAft>
             </a:pPr>
             <a:r>
-              <a:rPr sz="3000" b="1">
+              <a:rPr sz="2700" b="1">
                 <a:solidFill>
                   <a:srgbClr val="1A1F27"/>
                 </a:solidFill>
                 <a:latin typeface="Segoe UI"/>
               </a:rPr>
-              <a:t>Focused questions for coaches &amp; SMEs</a:t>
+              <a:t>The certified dataset, by the numbers</a:t>
             </a:r>
           </a:p>
         </p:txBody>
       </p:sp>
+      <p:graphicFrame>
+        <p:nvGraphicFramePr>
+          <p:cNvPr id="4" name="Table 3"/>
+          <p:cNvGraphicFramePr>
+            <a:graphicFrameLocks noGrp="1"/>
+          </p:cNvGraphicFramePr>
+          <p:nvPr/>
+        </p:nvGraphicFramePr>
+        <p:xfrm>
+          <a:off x="640080" y="1783080"/>
+          <a:ext cx="10927080" cy="2377440"/>
+        </p:xfrm>
+        <a:graphic>
+          <a:graphicData uri="http://schemas.openxmlformats.org/drawingml/2006/table">
+            <a:tbl>
+              <a:tblPr firstRow="1">
+                <a:tableStyleId>{5C22544A-7EE6-4342-B048-85BDC9FD1C3A}</a:tableStyleId>
+              </a:tblPr>
+              <a:tblGrid>
+                <a:gridCol w="2103120"/>
+                <a:gridCol w="3291840"/>
+                <a:gridCol w="1828800"/>
+                <a:gridCol w="2468880"/>
+                <a:gridCol w="1234440"/>
+              </a:tblGrid>
+              <a:tr h="475488">
+                <a:tc>
+                  <a:txBody>
+                    <a:bodyPr wrap="square"/>
+                    <a:lstStyle/>
+                    <a:p>
+                      <a:r>
+                        <a:rPr sz="1150" b="1">
+                          <a:solidFill>
+                            <a:srgbClr val="FFFFFF"/>
+                          </a:solidFill>
+                          <a:latin typeface="Segoe UI"/>
+                        </a:rPr>
+                        <a:t>Program</a:t>
+                      </a:r>
+                    </a:p>
+                  </a:txBody>
+                  <a:tcPr anchor="ctr" marL="82296" marR="54864" marT="18288" marB="18288">
+                    <a:solidFill>
+                      <a:srgbClr val="0E7C74"/>
+                    </a:solidFill>
+                  </a:tcPr>
+                </a:tc>
+                <a:tc>
+                  <a:txBody>
+                    <a:bodyPr wrap="square"/>
+                    <a:lstStyle/>
+                    <a:p>
+                      <a:r>
+                        <a:rPr sz="1150" b="1">
+                          <a:solidFill>
+                            <a:srgbClr val="FFFFFF"/>
+                          </a:solidFill>
+                          <a:latin typeface="Segoe UI"/>
+                        </a:rPr>
+                        <a:t>Call-level fields to certify</a:t>
+                      </a:r>
+                    </a:p>
+                  </a:txBody>
+                  <a:tcPr anchor="ctr" marL="82296" marR="54864" marT="18288" marB="18288">
+                    <a:solidFill>
+                      <a:srgbClr val="0E7C74"/>
+                    </a:solidFill>
+                  </a:tcPr>
+                </a:tc>
+                <a:tc>
+                  <a:txBody>
+                    <a:bodyPr wrap="square"/>
+                    <a:lstStyle/>
+                    <a:p>
+                      <a:r>
+                        <a:rPr sz="1150" b="1">
+                          <a:solidFill>
+                            <a:srgbClr val="FFFFFF"/>
+                          </a:solidFill>
+                          <a:latin typeface="Segoe UI"/>
+                        </a:rPr>
+                        <a:t>KPIs covered</a:t>
+                      </a:r>
+                    </a:p>
+                  </a:txBody>
+                  <a:tcPr anchor="ctr" marL="82296" marR="54864" marT="18288" marB="18288">
+                    <a:solidFill>
+                      <a:srgbClr val="0E7C74"/>
+                    </a:solidFill>
+                  </a:tcPr>
+                </a:tc>
+                <a:tc>
+                  <a:txBody>
+                    <a:bodyPr wrap="square"/>
+                    <a:lstStyle/>
+                    <a:p>
+                      <a:r>
+                        <a:rPr sz="1150" b="1">
+                          <a:solidFill>
+                            <a:srgbClr val="FFFFFF"/>
+                          </a:solidFill>
+                          <a:latin typeface="Segoe UI"/>
+                        </a:rPr>
+                        <a:t>Proposed golden calls</a:t>
+                      </a:r>
+                    </a:p>
+                  </a:txBody>
+                  <a:tcPr anchor="ctr" marL="82296" marR="54864" marT="18288" marB="18288">
+                    <a:solidFill>
+                      <a:srgbClr val="0E7C74"/>
+                    </a:solidFill>
+                  </a:tcPr>
+                </a:tc>
+                <a:tc>
+                  <a:txBody>
+                    <a:bodyPr wrap="square"/>
+                    <a:lstStyle/>
+                    <a:p>
+                      <a:r>
+                        <a:rPr sz="1150" b="1">
+                          <a:solidFill>
+                            <a:srgbClr val="FFFFFF"/>
+                          </a:solidFill>
+                          <a:latin typeface="Segoe UI"/>
+                        </a:rPr>
+                        <a:t>Reviewers</a:t>
+                      </a:r>
+                    </a:p>
+                  </a:txBody>
+                  <a:tcPr anchor="ctr" marL="82296" marR="54864" marT="18288" marB="18288">
+                    <a:solidFill>
+                      <a:srgbClr val="0E7C74"/>
+                    </a:solidFill>
+                  </a:tcPr>
+                </a:tc>
+              </a:tr>
+              <a:tr h="475488">
+                <a:tc>
+                  <a:txBody>
+                    <a:bodyPr wrap="square"/>
+                    <a:lstStyle/>
+                    <a:p>
+                      <a:r>
+                        <a:rPr sz="1300" b="1">
+                          <a:solidFill>
+                            <a:srgbClr val="1A1F27"/>
+                          </a:solidFill>
+                          <a:latin typeface="Segoe UI"/>
+                        </a:rPr>
+                        <a:t>Telesales</a:t>
+                      </a:r>
+                    </a:p>
+                  </a:txBody>
+                  <a:tcPr anchor="ctr" marL="82296" marR="54864" marT="18288" marB="18288">
+                    <a:solidFill>
+                      <a:srgbClr val="FFFFFF"/>
+                    </a:solidFill>
+                  </a:tcPr>
+                </a:tc>
+                <a:tc>
+                  <a:txBody>
+                    <a:bodyPr wrap="square"/>
+                    <a:lstStyle/>
+                    <a:p>
+                      <a:r>
+                        <a:rPr sz="1300" b="0">
+                          <a:solidFill>
+                            <a:srgbClr val="535C6A"/>
+                          </a:solidFill>
+                          <a:latin typeface="Segoe UI"/>
+                        </a:rPr>
+                        <a:t>≈30</a:t>
+                      </a:r>
+                    </a:p>
+                  </a:txBody>
+                  <a:tcPr anchor="ctr" marL="82296" marR="54864" marT="18288" marB="18288">
+                    <a:solidFill>
+                      <a:srgbClr val="FFFFFF"/>
+                    </a:solidFill>
+                  </a:tcPr>
+                </a:tc>
+                <a:tc>
+                  <a:txBody>
+                    <a:bodyPr wrap="square"/>
+                    <a:lstStyle/>
+                    <a:p>
+                      <a:r>
+                        <a:rPr sz="1300" b="0">
+                          <a:solidFill>
+                            <a:srgbClr val="535C6A"/>
+                          </a:solidFill>
+                          <a:latin typeface="Segoe UI"/>
+                        </a:rPr>
+                        <a:t>12</a:t>
+                      </a:r>
+                    </a:p>
+                  </a:txBody>
+                  <a:tcPr anchor="ctr" marL="82296" marR="54864" marT="18288" marB="18288">
+                    <a:solidFill>
+                      <a:srgbClr val="FFFFFF"/>
+                    </a:solidFill>
+                  </a:tcPr>
+                </a:tc>
+                <a:tc>
+                  <a:txBody>
+                    <a:bodyPr wrap="square"/>
+                    <a:lstStyle/>
+                    <a:p>
+                      <a:r>
+                        <a:rPr sz="1300" b="0">
+                          <a:solidFill>
+                            <a:srgbClr val="535C6A"/>
+                          </a:solidFill>
+                          <a:latin typeface="Segoe UI"/>
+                        </a:rPr>
+                        <a:t>150</a:t>
+                      </a:r>
+                    </a:p>
+                  </a:txBody>
+                  <a:tcPr anchor="ctr" marL="82296" marR="54864" marT="18288" marB="18288">
+                    <a:solidFill>
+                      <a:srgbClr val="FFFFFF"/>
+                    </a:solidFill>
+                  </a:tcPr>
+                </a:tc>
+                <a:tc>
+                  <a:txBody>
+                    <a:bodyPr wrap="square"/>
+                    <a:lstStyle/>
+                    <a:p>
+                      <a:r>
+                        <a:rPr sz="1300" b="0">
+                          <a:solidFill>
+                            <a:srgbClr val="535C6A"/>
+                          </a:solidFill>
+                          <a:latin typeface="Segoe UI"/>
+                        </a:rPr>
+                        <a:t>≥2</a:t>
+                      </a:r>
+                    </a:p>
+                  </a:txBody>
+                  <a:tcPr anchor="ctr" marL="82296" marR="54864" marT="18288" marB="18288">
+                    <a:solidFill>
+                      <a:srgbClr val="FFFFFF"/>
+                    </a:solidFill>
+                  </a:tcPr>
+                </a:tc>
+              </a:tr>
+              <a:tr h="475488">
+                <a:tc>
+                  <a:txBody>
+                    <a:bodyPr wrap="square"/>
+                    <a:lstStyle/>
+                    <a:p>
+                      <a:r>
+                        <a:rPr sz="1300" b="1">
+                          <a:solidFill>
+                            <a:srgbClr val="1A1F27"/>
+                          </a:solidFill>
+                          <a:latin typeface="Segoe UI"/>
+                        </a:rPr>
+                        <a:t>WCC</a:t>
+                      </a:r>
+                    </a:p>
+                  </a:txBody>
+                  <a:tcPr anchor="ctr" marL="82296" marR="54864" marT="18288" marB="18288">
+                    <a:solidFill>
+                      <a:srgbClr val="F7F9F8"/>
+                    </a:solidFill>
+                  </a:tcPr>
+                </a:tc>
+                <a:tc>
+                  <a:txBody>
+                    <a:bodyPr wrap="square"/>
+                    <a:lstStyle/>
+                    <a:p>
+                      <a:r>
+                        <a:rPr sz="1300" b="0">
+                          <a:solidFill>
+                            <a:srgbClr val="535C6A"/>
+                          </a:solidFill>
+                          <a:latin typeface="Segoe UI"/>
+                        </a:rPr>
+                        <a:t>≈40</a:t>
+                      </a:r>
+                    </a:p>
+                  </a:txBody>
+                  <a:tcPr anchor="ctr" marL="82296" marR="54864" marT="18288" marB="18288">
+                    <a:solidFill>
+                      <a:srgbClr val="F7F9F8"/>
+                    </a:solidFill>
+                  </a:tcPr>
+                </a:tc>
+                <a:tc>
+                  <a:txBody>
+                    <a:bodyPr wrap="square"/>
+                    <a:lstStyle/>
+                    <a:p>
+                      <a:r>
+                        <a:rPr sz="1300" b="0">
+                          <a:solidFill>
+                            <a:srgbClr val="535C6A"/>
+                          </a:solidFill>
+                          <a:latin typeface="Segoe UI"/>
+                        </a:rPr>
+                        <a:t>11</a:t>
+                      </a:r>
+                    </a:p>
+                  </a:txBody>
+                  <a:tcPr anchor="ctr" marL="82296" marR="54864" marT="18288" marB="18288">
+                    <a:solidFill>
+                      <a:srgbClr val="F7F9F8"/>
+                    </a:solidFill>
+                  </a:tcPr>
+                </a:tc>
+                <a:tc>
+                  <a:txBody>
+                    <a:bodyPr wrap="square"/>
+                    <a:lstStyle/>
+                    <a:p>
+                      <a:r>
+                        <a:rPr sz="1300" b="0">
+                          <a:solidFill>
+                            <a:srgbClr val="535C6A"/>
+                          </a:solidFill>
+                          <a:latin typeface="Segoe UI"/>
+                        </a:rPr>
+                        <a:t>150</a:t>
+                      </a:r>
+                    </a:p>
+                  </a:txBody>
+                  <a:tcPr anchor="ctr" marL="82296" marR="54864" marT="18288" marB="18288">
+                    <a:solidFill>
+                      <a:srgbClr val="F7F9F8"/>
+                    </a:solidFill>
+                  </a:tcPr>
+                </a:tc>
+                <a:tc>
+                  <a:txBody>
+                    <a:bodyPr wrap="square"/>
+                    <a:lstStyle/>
+                    <a:p>
+                      <a:r>
+                        <a:rPr sz="1300" b="0">
+                          <a:solidFill>
+                            <a:srgbClr val="535C6A"/>
+                          </a:solidFill>
+                          <a:latin typeface="Segoe UI"/>
+                        </a:rPr>
+                        <a:t>≥2</a:t>
+                      </a:r>
+                    </a:p>
+                  </a:txBody>
+                  <a:tcPr anchor="ctr" marL="82296" marR="54864" marT="18288" marB="18288">
+                    <a:solidFill>
+                      <a:srgbClr val="F7F9F8"/>
+                    </a:solidFill>
+                  </a:tcPr>
+                </a:tc>
+              </a:tr>
+              <a:tr h="475488">
+                <a:tc>
+                  <a:txBody>
+                    <a:bodyPr wrap="square"/>
+                    <a:lstStyle/>
+                    <a:p>
+                      <a:r>
+                        <a:rPr sz="1300" b="1">
+                          <a:solidFill>
+                            <a:srgbClr val="1A1F27"/>
+                          </a:solidFill>
+                          <a:latin typeface="Segoe UI"/>
+                        </a:rPr>
+                        <a:t>PSO</a:t>
+                      </a:r>
+                    </a:p>
+                  </a:txBody>
+                  <a:tcPr anchor="ctr" marL="82296" marR="54864" marT="18288" marB="18288">
+                    <a:solidFill>
+                      <a:srgbClr val="FFFFFF"/>
+                    </a:solidFill>
+                  </a:tcPr>
+                </a:tc>
+                <a:tc>
+                  <a:txBody>
+                    <a:bodyPr wrap="square"/>
+                    <a:lstStyle/>
+                    <a:p>
+                      <a:r>
+                        <a:rPr sz="1300" b="0">
+                          <a:solidFill>
+                            <a:srgbClr val="535C6A"/>
+                          </a:solidFill>
+                          <a:latin typeface="Segoe UI"/>
+                        </a:rPr>
+                        <a:t>≈60</a:t>
+                      </a:r>
+                    </a:p>
+                  </a:txBody>
+                  <a:tcPr anchor="ctr" marL="82296" marR="54864" marT="18288" marB="18288">
+                    <a:solidFill>
+                      <a:srgbClr val="FFFFFF"/>
+                    </a:solidFill>
+                  </a:tcPr>
+                </a:tc>
+                <a:tc>
+                  <a:txBody>
+                    <a:bodyPr wrap="square"/>
+                    <a:lstStyle/>
+                    <a:p>
+                      <a:r>
+                        <a:rPr sz="1300" b="0">
+                          <a:solidFill>
+                            <a:srgbClr val="535C6A"/>
+                          </a:solidFill>
+                          <a:latin typeface="Segoe UI"/>
+                        </a:rPr>
+                        <a:t>24</a:t>
+                      </a:r>
+                    </a:p>
+                  </a:txBody>
+                  <a:tcPr anchor="ctr" marL="82296" marR="54864" marT="18288" marB="18288">
+                    <a:solidFill>
+                      <a:srgbClr val="FFFFFF"/>
+                    </a:solidFill>
+                  </a:tcPr>
+                </a:tc>
+                <a:tc>
+                  <a:txBody>
+                    <a:bodyPr wrap="square"/>
+                    <a:lstStyle/>
+                    <a:p>
+                      <a:r>
+                        <a:rPr sz="1300" b="0">
+                          <a:solidFill>
+                            <a:srgbClr val="535C6A"/>
+                          </a:solidFill>
+                          <a:latin typeface="Segoe UI"/>
+                        </a:rPr>
+                        <a:t>200</a:t>
+                      </a:r>
+                    </a:p>
+                  </a:txBody>
+                  <a:tcPr anchor="ctr" marL="82296" marR="54864" marT="18288" marB="18288">
+                    <a:solidFill>
+                      <a:srgbClr val="FFFFFF"/>
+                    </a:solidFill>
+                  </a:tcPr>
+                </a:tc>
+                <a:tc>
+                  <a:txBody>
+                    <a:bodyPr wrap="square"/>
+                    <a:lstStyle/>
+                    <a:p>
+                      <a:r>
+                        <a:rPr sz="1300" b="0">
+                          <a:solidFill>
+                            <a:srgbClr val="535C6A"/>
+                          </a:solidFill>
+                          <a:latin typeface="Segoe UI"/>
+                        </a:rPr>
+                        <a:t>≥2</a:t>
+                      </a:r>
+                    </a:p>
+                  </a:txBody>
+                  <a:tcPr anchor="ctr" marL="82296" marR="54864" marT="18288" marB="18288">
+                    <a:solidFill>
+                      <a:srgbClr val="FFFFFF"/>
+                    </a:solidFill>
+                  </a:tcPr>
+                </a:tc>
+              </a:tr>
+              <a:tr h="475488">
+                <a:tc>
+                  <a:txBody>
+                    <a:bodyPr wrap="square"/>
+                    <a:lstStyle/>
+                    <a:p>
+                      <a:r>
+                        <a:rPr sz="1300" b="1">
+                          <a:solidFill>
+                            <a:srgbClr val="1A1F27"/>
+                          </a:solidFill>
+                          <a:latin typeface="Segoe UI"/>
+                        </a:rPr>
+                        <a:t>Total</a:t>
+                      </a:r>
+                    </a:p>
+                  </a:txBody>
+                  <a:tcPr anchor="ctr" marL="82296" marR="54864" marT="18288" marB="18288">
+                    <a:solidFill>
+                      <a:srgbClr val="F7F9F8"/>
+                    </a:solidFill>
+                  </a:tcPr>
+                </a:tc>
+                <a:tc>
+                  <a:txBody>
+                    <a:bodyPr wrap="square"/>
+                    <a:lstStyle/>
+                    <a:p>
+                      <a:r>
+                        <a:rPr sz="1300" b="0">
+                          <a:solidFill>
+                            <a:srgbClr val="535C6A"/>
+                          </a:solidFill>
+                          <a:latin typeface="Segoe UI"/>
+                        </a:rPr>
+                        <a:t>—</a:t>
+                      </a:r>
+                    </a:p>
+                  </a:txBody>
+                  <a:tcPr anchor="ctr" marL="82296" marR="54864" marT="18288" marB="18288">
+                    <a:solidFill>
+                      <a:srgbClr val="F7F9F8"/>
+                    </a:solidFill>
+                  </a:tcPr>
+                </a:tc>
+                <a:tc>
+                  <a:txBody>
+                    <a:bodyPr wrap="square"/>
+                    <a:lstStyle/>
+                    <a:p>
+                      <a:r>
+                        <a:rPr sz="1300" b="0">
+                          <a:solidFill>
+                            <a:srgbClr val="535C6A"/>
+                          </a:solidFill>
+                          <a:latin typeface="Segoe UI"/>
+                        </a:rPr>
+                        <a:t>47</a:t>
+                      </a:r>
+                    </a:p>
+                  </a:txBody>
+                  <a:tcPr anchor="ctr" marL="82296" marR="54864" marT="18288" marB="18288">
+                    <a:solidFill>
+                      <a:srgbClr val="F7F9F8"/>
+                    </a:solidFill>
+                  </a:tcPr>
+                </a:tc>
+                <a:tc>
+                  <a:txBody>
+                    <a:bodyPr wrap="square"/>
+                    <a:lstStyle/>
+                    <a:p>
+                      <a:r>
+                        <a:rPr sz="1300" b="0">
+                          <a:solidFill>
+                            <a:srgbClr val="535C6A"/>
+                          </a:solidFill>
+                          <a:latin typeface="Segoe UI"/>
+                        </a:rPr>
+                        <a:t>500</a:t>
+                      </a:r>
+                    </a:p>
+                  </a:txBody>
+                  <a:tcPr anchor="ctr" marL="82296" marR="54864" marT="18288" marB="18288">
+                    <a:solidFill>
+                      <a:srgbClr val="F7F9F8"/>
+                    </a:solidFill>
+                  </a:tcPr>
+                </a:tc>
+                <a:tc>
+                  <a:txBody>
+                    <a:bodyPr wrap="square"/>
+                    <a:lstStyle/>
+                    <a:p>
+                      <a:r>
+                        <a:rPr sz="1300" b="0">
+                          <a:solidFill>
+                            <a:srgbClr val="535C6A"/>
+                          </a:solidFill>
+                          <a:latin typeface="Segoe UI"/>
+                        </a:rPr>
+                        <a:t>—</a:t>
+                      </a:r>
+                    </a:p>
+                  </a:txBody>
+                  <a:tcPr anchor="ctr" marL="82296" marR="54864" marT="18288" marB="18288">
+                    <a:solidFill>
+                      <a:srgbClr val="F7F9F8"/>
+                    </a:solidFill>
+                  </a:tcPr>
+                </a:tc>
+              </a:tr>
+            </a:tbl>
+          </a:graphicData>
+        </a:graphic>
+      </p:graphicFrame>
       <p:sp>
         <p:nvSpPr>
-          <p:cNvPr id="4" name="TextBox 3"/>
+          <p:cNvPr id="5" name="TextBox 4"/>
           <p:cNvSpPr txBox="1"/>
           <p:nvPr/>
         </p:nvSpPr>
         <p:spPr>
           <a:xfrm>
-            <a:off x="685800" y="1965960"/>
-            <a:ext cx="10881360" cy="4297680"/>
+            <a:off x="685800" y="4160520"/>
+            <a:ext cx="10881360" cy="4206240"/>
           </a:xfrm>
           <a:prstGeom prst="rect">
             <a:avLst/>
@@ -4511,120 +7498,49 @@
           <a:p>
             <a:pPr>
               <a:spcAft>
-                <a:spcPts val="1600"/>
+                <a:spcPts val="1100"/>
               </a:spcAft>
             </a:pPr>
             <a:r>
-              <a:rPr sz="1800" b="0">
+              <a:rPr sz="1450" b="0">
                 <a:solidFill>
                   <a:srgbClr val="1A1F27"/>
                 </a:solidFill>
                 <a:latin typeface="Segoe UI"/>
               </a:rPr>
-              <a:t>1.   Certify labels on a sample of calls — this creates the golden set.</a:t>
+              <a:t>Certify at the call level (not the aggregate) — coaches confirm each field + its evidence.</a:t>
             </a:r>
           </a:p>
           <a:p>
             <a:pPr>
               <a:spcAft>
-                <a:spcPts val="1600"/>
+                <a:spcPts val="1100"/>
               </a:spcAft>
             </a:pPr>
             <a:r>
-              <a:rPr sz="1800" b="0">
+              <a:rPr sz="1450" b="0">
                 <a:solidFill>
                   <a:srgbClr val="1A1F27"/>
                 </a:solidFill>
                 <a:latin typeface="Segoe UI"/>
               </a:rPr>
-              <a:t>2.   Confirm a few ambiguous KPI definitions we've flagged.</a:t>
+              <a:t>Coverage per KPI: ≥ 15 positive AND ≥ 15 negative certified calls; rare fields (escalations, saves, Poor CX) over-sampled.</a:t>
             </a:r>
           </a:p>
           <a:p>
             <a:pPr>
               <a:spcAft>
-                <a:spcPts val="1600"/>
+                <a:spcPts val="1100"/>
               </a:spcAft>
             </a:pPr>
             <a:r>
-              <a:rPr sz="1800" b="0">
+              <a:rPr sz="1450" b="0">
                 <a:solidFill>
                   <a:srgbClr val="1A1F27"/>
                 </a:solidFill>
                 <a:latin typeface="Segoe UI"/>
               </a:rPr>
-              <a:t>3.   Define what makes a coaching recommendation “good” (a rubric).</a:t>
-            </a:r>
-          </a:p>
-          <a:p>
-            <a:pPr>
-              <a:spcAft>
-                <a:spcPts val="1600"/>
-              </a:spcAft>
-            </a:pPr>
-            <a:r>
-              <a:rPr sz="1800" b="0">
-                <a:solidFill>
-                  <a:srgbClr val="1A1F27"/>
-                </a:solidFill>
-                <a:latin typeface="Segoe UI"/>
-              </a:rPr>
-              <a:t>4.   Set the acceptable range for each KPI.</a:t>
-            </a:r>
-          </a:p>
-          <a:p>
-            <a:pPr>
-              <a:spcAft>
-                <a:spcPts val="1600"/>
-              </a:spcAft>
-            </a:pPr>
-            <a:r>
-              <a:rPr sz="1800" b="0">
-                <a:solidFill>
-                  <a:srgbClr val="1A1F27"/>
-                </a:solidFill>
-                <a:latin typeface="Segoe UI"/>
-              </a:rPr>
-              <a:t>5.   Confirm the operational metrics exist for WCC &amp; PSO agents.</a:t>
-            </a:r>
-          </a:p>
-        </p:txBody>
-      </p:sp>
-      <p:sp>
-        <p:nvSpPr>
-          <p:cNvPr id="5" name="TextBox 4"/>
-          <p:cNvSpPr txBox="1"/>
-          <p:nvPr/>
-        </p:nvSpPr>
-        <p:spPr>
-          <a:xfrm>
-            <a:off x="685800" y="6126480"/>
-            <a:ext cx="10881360" cy="640080"/>
-          </a:xfrm>
-          <a:prstGeom prst="rect">
-            <a:avLst/>
-          </a:prstGeom>
-          <a:noFill/>
-        </p:spPr>
-        <p:txBody>
-          <a:bodyPr wrap="square">
-            <a:spAutoFit/>
-          </a:bodyPr>
-          <a:lstStyle/>
-          <a:p>
-            <a:pPr>
-              <a:spcAft>
-                <a:spcPts val="0"/>
-              </a:spcAft>
-            </a:pPr>
-            <a:r>
-              <a:rPr sz="1350" b="0">
-                <a:solidFill>
-                  <a:srgbClr val="8A93A1"/>
-                </a:solidFill>
-                <a:latin typeface="Segoe UI"/>
-              </a:rPr>
-              <a:t>These are specific asks — the basic definitions are already worked out internally.</a:t>
+              <a:t>Keep only calls where ≥ 2 reviewers agree; disagreement = the definition needs fixing.</a:t>
             </a:r>
           </a:p>
         </p:txBody>
@@ -4706,8 +7622,8 @@
         </p:nvSpPr>
         <p:spPr>
           <a:xfrm>
-            <a:off x="640080" y="457200"/>
-            <a:ext cx="10972800" cy="1371600"/>
+            <a:off x="640080" y="384048"/>
+            <a:ext cx="11155680" cy="1280160"/>
           </a:xfrm>
           <a:prstGeom prst="rect">
             <a:avLst/>
@@ -4722,7 +7638,7 @@
           <a:p>
             <a:pPr>
               <a:spcAft>
-                <a:spcPts val="600"/>
+                <a:spcPts val="500"/>
               </a:spcAft>
             </a:pPr>
             <a:r>
@@ -4732,7 +7648,7 @@
                 </a:solidFill>
                 <a:latin typeface="Segoe UI"/>
               </a:rPr>
-              <a:t>HOW WE VALIDATE</a:t>
+              <a:t>STATUS</a:t>
             </a:r>
           </a:p>
           <a:p>
@@ -4742,13 +7658,13 @@
               </a:spcAft>
             </a:pPr>
             <a:r>
-              <a:rPr sz="3000" b="1">
+              <a:rPr sz="2700" b="1">
                 <a:solidFill>
                   <a:srgbClr val="1A1F27"/>
                 </a:solidFill>
                 <a:latin typeface="Segoe UI"/>
               </a:rPr>
-              <a:t>Aggregate KPIs don't need aggregate golden data</a:t>
+              <a:t>What's there  /  what we need</a:t>
             </a:r>
           </a:p>
         </p:txBody>
@@ -4761,8 +7677,8 @@
         </p:nvSpPr>
         <p:spPr>
           <a:xfrm>
-            <a:off x="685800" y="1965960"/>
-            <a:ext cx="10881360" cy="2743200"/>
+            <a:off x="685800" y="1828800"/>
+            <a:ext cx="5303520" cy="4206240"/>
           </a:xfrm>
           <a:prstGeom prst="rect">
             <a:avLst/>
@@ -4777,121 +7693,216 @@
           <a:p>
             <a:pPr>
               <a:spcAft>
-                <a:spcPts val="1400"/>
+                <a:spcPts val="1100"/>
               </a:spcAft>
             </a:pPr>
             <a:r>
-              <a:rPr sz="1700" b="0">
+              <a:rPr sz="1500" b="0">
+                <a:solidFill>
+                  <a:srgbClr val="2E8B5E"/>
+                </a:solidFill>
+                <a:latin typeface="Segoe UI"/>
+              </a:rPr>
+              <a:t>WHAT'S THERE</a:t>
+            </a:r>
+          </a:p>
+          <a:p>
+            <a:pPr>
+              <a:spcAft>
+                <a:spcPts val="1100"/>
+              </a:spcAft>
+            </a:pPr>
+            <a:r>
+              <a:rPr sz="1500" b="0">
                 <a:solidFill>
                   <a:srgbClr val="535C6A"/>
                 </a:solidFill>
                 <a:latin typeface="Segoe UI"/>
               </a:rPr>
-              <a:t>Certify the call-level judgments — with coaches.</a:t>
+              <a:t>All 47 KPIs mapped (field → calc → unit)</a:t>
             </a:r>
           </a:p>
           <a:p>
             <a:pPr>
               <a:spcAft>
-                <a:spcPts val="1400"/>
+                <a:spcPts val="1100"/>
               </a:spcAft>
             </a:pPr>
             <a:r>
-              <a:rPr sz="1700" b="0">
+              <a:rPr sz="1500" b="0">
                 <a:solidFill>
                   <a:srgbClr val="535C6A"/>
                 </a:solidFill>
                 <a:latin typeface="Segoe UI"/>
               </a:rPr>
-              <a:t>KPIs are exact arithmetic on top — tested automatically, no labelling needed.</a:t>
+              <a:t>3 programs documented</a:t>
             </a:r>
           </a:p>
           <a:p>
             <a:pPr>
               <a:spcAft>
-                <a:spcPts val="1400"/>
+                <a:spcPts val="1100"/>
               </a:spcAft>
             </a:pPr>
             <a:r>
-              <a:rPr sz="1700" b="0">
+              <a:rPr sz="1500" b="0">
                 <a:solidFill>
                   <a:srgbClr val="535C6A"/>
                 </a:solidFill>
                 <a:latin typeface="Segoe UI"/>
               </a:rPr>
-              <a:t>Coaching narrative — judged against an SME rubric.</a:t>
+              <a:t>Evidence trail on every judgment</a:t>
             </a:r>
           </a:p>
           <a:p>
             <a:pPr>
               <a:spcAft>
-                <a:spcPts val="1400"/>
+                <a:spcPts val="1100"/>
               </a:spcAft>
             </a:pPr>
             <a:r>
-              <a:rPr sz="1700" b="0">
+              <a:rPr sz="1500" b="0">
                 <a:solidFill>
                   <a:srgbClr val="535C6A"/>
                 </a:solidFill>
                 <a:latin typeface="Segoe UI"/>
               </a:rPr>
-              <a:t>Operational metrics — validated as data, not model output.</a:t>
+              <a:t>Labelling fixed (count vs rate)</a:t>
+            </a:r>
+          </a:p>
+          <a:p>
+            <a:pPr>
+              <a:spcAft>
+                <a:spcPts val="1100"/>
+              </a:spcAft>
+            </a:pPr>
+            <a:r>
+              <a:rPr sz="1500" b="0">
+                <a:solidFill>
+                  <a:srgbClr val="535C6A"/>
+                </a:solidFill>
+                <a:latin typeface="Segoe UI"/>
+              </a:rPr>
+              <a:t>Evaluation platform integrated</a:t>
             </a:r>
           </a:p>
         </p:txBody>
       </p:sp>
       <p:sp>
         <p:nvSpPr>
-          <p:cNvPr id="5" name="Rectangle 4"/>
-          <p:cNvSpPr/>
+          <p:cNvPr id="5" name="TextBox 4"/>
+          <p:cNvSpPr txBox="1"/>
           <p:nvPr/>
         </p:nvSpPr>
         <p:spPr>
           <a:xfrm>
-            <a:off x="685800" y="5394960"/>
-            <a:ext cx="10881360" cy="868680"/>
+            <a:off x="6355080" y="1828800"/>
+            <a:ext cx="5120640" cy="4206240"/>
           </a:xfrm>
           <a:prstGeom prst="rect">
             <a:avLst/>
           </a:prstGeom>
-          <a:solidFill>
-            <a:srgbClr val="F2F5F4"/>
-          </a:solidFill>
-          <a:ln>
-            <a:noFill/>
-          </a:ln>
+          <a:noFill/>
         </p:spPr>
-        <p:style>
-          <a:lnRef idx="1">
-            <a:schemeClr val="accent1"/>
-          </a:lnRef>
-          <a:fillRef idx="3">
-            <a:schemeClr val="accent1"/>
-          </a:fillRef>
-          <a:effectRef idx="2">
-            <a:schemeClr val="accent1"/>
-          </a:effectRef>
-          <a:fontRef idx="minor">
-            <a:schemeClr val="lt1"/>
-          </a:fontRef>
-        </p:style>
         <p:txBody>
-          <a:bodyPr rtlCol="0" anchor="ctr" wrap="square" lIns="228600"/>
+          <a:bodyPr wrap="square">
+            <a:spAutoFit/>
+          </a:bodyPr>
           <a:lstStyle/>
           <a:p>
-            <a:pPr algn="ctr">
+            <a:pPr>
               <a:spcAft>
-                <a:spcPts val="0"/>
+                <a:spcPts val="1100"/>
               </a:spcAft>
             </a:pPr>
             <a:r>
-              <a:rPr sz="1700" b="1">
+              <a:rPr sz="1500" b="0">
                 <a:solidFill>
-                  <a:srgbClr val="0E7C74"/>
+                  <a:srgbClr val="A96E12"/>
                 </a:solidFill>
                 <a:latin typeface="Segoe UI"/>
               </a:rPr>
-              <a:t>Certify the call level, and the KPIs are right by construction.</a:t>
+              <a:t>WHAT WE NEED</a:t>
+            </a:r>
+          </a:p>
+          <a:p>
+            <a:pPr>
+              <a:spcAft>
+                <a:spcPts val="1100"/>
+              </a:spcAft>
+            </a:pPr>
+            <a:r>
+              <a:rPr sz="1500" b="0">
+                <a:solidFill>
+                  <a:srgbClr val="535C6A"/>
+                </a:solidFill>
+                <a:latin typeface="Segoe UI"/>
+              </a:rPr>
+              <a:t>Golden data (table on previous slide)</a:t>
+            </a:r>
+          </a:p>
+          <a:p>
+            <a:pPr>
+              <a:spcAft>
+                <a:spcPts val="1100"/>
+              </a:spcAft>
+            </a:pPr>
+            <a:r>
+              <a:rPr sz="1500" b="0">
+                <a:solidFill>
+                  <a:srgbClr val="535C6A"/>
+                </a:solidFill>
+                <a:latin typeface="Segoe UI"/>
+              </a:rPr>
+              <a:t>Roll-up score re-specified per program</a:t>
+            </a:r>
+          </a:p>
+          <a:p>
+            <a:pPr>
+              <a:spcAft>
+                <a:spcPts val="1100"/>
+              </a:spcAft>
+            </a:pPr>
+            <a:r>
+              <a:rPr sz="1500" b="0">
+                <a:solidFill>
+                  <a:srgbClr val="535C6A"/>
+                </a:solidFill>
+                <a:latin typeface="Segoe UI"/>
+              </a:rPr>
+              <a:t>WCC prompt aligned to its scorecard</a:t>
+            </a:r>
+          </a:p>
+          <a:p>
+            <a:pPr>
+              <a:spcAft>
+                <a:spcPts val="1100"/>
+              </a:spcAft>
+            </a:pPr>
+            <a:r>
+              <a:rPr sz="1500" b="0">
+                <a:solidFill>
+                  <a:srgbClr val="535C6A"/>
+                </a:solidFill>
+                <a:latin typeface="Segoe UI"/>
+              </a:rPr>
+              <a:t>Acceptance threshold per KPI</a:t>
+            </a:r>
+          </a:p>
+          <a:p>
+            <a:pPr>
+              <a:spcAft>
+                <a:spcPts val="1100"/>
+              </a:spcAft>
+            </a:pPr>
+            <a:r>
+              <a:rPr sz="1500" b="0">
+                <a:solidFill>
+                  <a:srgbClr val="535C6A"/>
+                </a:solidFill>
+                <a:latin typeface="Segoe UI"/>
+              </a:rPr>
+              <a:t>A few definitions confirmed by SMEs</a:t>
             </a:r>
           </a:p>
         </p:txBody>
@@ -4973,8 +7984,8 @@
         </p:nvSpPr>
         <p:spPr>
           <a:xfrm>
-            <a:off x="640080" y="457200"/>
-            <a:ext cx="10972800" cy="1371600"/>
+            <a:off x="640080" y="384048"/>
+            <a:ext cx="11155680" cy="1280160"/>
           </a:xfrm>
           <a:prstGeom prst="rect">
             <a:avLst/>
@@ -4989,7 +8000,7 @@
           <a:p>
             <a:pPr>
               <a:spcAft>
-                <a:spcPts val="600"/>
+                <a:spcPts val="500"/>
               </a:spcAft>
             </a:pPr>
             <a:r>
@@ -4999,7 +8010,7 @@
                 </a:solidFill>
                 <a:latin typeface="Segoe UI"/>
               </a:rPr>
-              <a:t>NEXT</a:t>
+              <a:t>WHAT WE ASK THE BUSINESS</a:t>
             </a:r>
           </a:p>
           <a:p>
@@ -5009,27 +8020,531 @@
               </a:spcAft>
             </a:pPr>
             <a:r>
-              <a:rPr sz="3000" b="1">
+              <a:rPr sz="2700" b="1">
                 <a:solidFill>
                   <a:srgbClr val="1A1F27"/>
                 </a:solidFill>
                 <a:latin typeface="Segoe UI"/>
               </a:rPr>
-              <a:t>Proposed next steps</a:t>
-            </a:r>
+              <a:t>Five focused requests</a:t>
+            </a:r>
+          </a:p>
+        </p:txBody>
+      </p:sp>
+      <p:graphicFrame>
+        <p:nvGraphicFramePr>
+          <p:cNvPr id="4" name="Table 3"/>
+          <p:cNvGraphicFramePr>
+            <a:graphicFrameLocks noGrp="1"/>
+          </p:cNvGraphicFramePr>
+          <p:nvPr/>
+        </p:nvGraphicFramePr>
+        <p:xfrm>
+          <a:off x="640080" y="1783080"/>
+          <a:ext cx="10927080" cy="3291840"/>
+        </p:xfrm>
+        <a:graphic>
+          <a:graphicData uri="http://schemas.openxmlformats.org/drawingml/2006/table">
+            <a:tbl>
+              <a:tblPr firstRow="1">
+                <a:tableStyleId>{5C22544A-7EE6-4342-B048-85BDC9FD1C3A}</a:tableStyleId>
+              </a:tblPr>
+              <a:tblGrid>
+                <a:gridCol w="640080"/>
+                <a:gridCol w="6766560"/>
+                <a:gridCol w="3520440"/>
+              </a:tblGrid>
+              <a:tr h="548640">
+                <a:tc>
+                  <a:txBody>
+                    <a:bodyPr wrap="square"/>
+                    <a:lstStyle/>
+                    <a:p>
+                      <a:r>
+                        <a:rPr sz="1150" b="1">
+                          <a:solidFill>
+                            <a:srgbClr val="FFFFFF"/>
+                          </a:solidFill>
+                          <a:latin typeface="Segoe UI"/>
+                        </a:rPr>
+                        <a:t>#</a:t>
+                      </a:r>
+                    </a:p>
+                  </a:txBody>
+                  <a:tcPr anchor="ctr" marL="82296" marR="54864" marT="18288" marB="18288">
+                    <a:solidFill>
+                      <a:srgbClr val="0E7C74"/>
+                    </a:solidFill>
+                  </a:tcPr>
+                </a:tc>
+                <a:tc>
+                  <a:txBody>
+                    <a:bodyPr wrap="square"/>
+                    <a:lstStyle/>
+                    <a:p>
+                      <a:r>
+                        <a:rPr sz="1150" b="1">
+                          <a:solidFill>
+                            <a:srgbClr val="FFFFFF"/>
+                          </a:solidFill>
+                          <a:latin typeface="Segoe UI"/>
+                        </a:rPr>
+                        <a:t>Ask</a:t>
+                      </a:r>
+                    </a:p>
+                  </a:txBody>
+                  <a:tcPr anchor="ctr" marL="82296" marR="54864" marT="18288" marB="18288">
+                    <a:solidFill>
+                      <a:srgbClr val="0E7C74"/>
+                    </a:solidFill>
+                  </a:tcPr>
+                </a:tc>
+                <a:tc>
+                  <a:txBody>
+                    <a:bodyPr wrap="square"/>
+                    <a:lstStyle/>
+                    <a:p>
+                      <a:r>
+                        <a:rPr sz="1150" b="1">
+                          <a:solidFill>
+                            <a:srgbClr val="FFFFFF"/>
+                          </a:solidFill>
+                          <a:latin typeface="Segoe UI"/>
+                        </a:rPr>
+                        <a:t>Gives us</a:t>
+                      </a:r>
+                    </a:p>
+                  </a:txBody>
+                  <a:tcPr anchor="ctr" marL="82296" marR="54864" marT="18288" marB="18288">
+                    <a:solidFill>
+                      <a:srgbClr val="0E7C74"/>
+                    </a:solidFill>
+                  </a:tcPr>
+                </a:tc>
+              </a:tr>
+              <a:tr h="548640">
+                <a:tc>
+                  <a:txBody>
+                    <a:bodyPr wrap="square"/>
+                    <a:lstStyle/>
+                    <a:p>
+                      <a:r>
+                        <a:rPr sz="1300" b="1">
+                          <a:solidFill>
+                            <a:srgbClr val="1A1F27"/>
+                          </a:solidFill>
+                          <a:latin typeface="Segoe UI"/>
+                        </a:rPr>
+                        <a:t>1</a:t>
+                      </a:r>
+                    </a:p>
+                  </a:txBody>
+                  <a:tcPr anchor="ctr" marL="82296" marR="54864" marT="18288" marB="18288">
+                    <a:solidFill>
+                      <a:srgbClr val="FFFFFF"/>
+                    </a:solidFill>
+                  </a:tcPr>
+                </a:tc>
+                <a:tc>
+                  <a:txBody>
+                    <a:bodyPr wrap="square"/>
+                    <a:lstStyle/>
+                    <a:p>
+                      <a:r>
+                        <a:rPr sz="1300" b="0">
+                          <a:solidFill>
+                            <a:srgbClr val="535C6A"/>
+                          </a:solidFill>
+                          <a:latin typeface="Segoe UI"/>
+                        </a:rPr>
+                        <a:t>Certify labels on the proposed golden calls</a:t>
+                      </a:r>
+                    </a:p>
+                  </a:txBody>
+                  <a:tcPr anchor="ctr" marL="82296" marR="54864" marT="18288" marB="18288">
+                    <a:solidFill>
+                      <a:srgbClr val="FFFFFF"/>
+                    </a:solidFill>
+                  </a:tcPr>
+                </a:tc>
+                <a:tc>
+                  <a:txBody>
+                    <a:bodyPr wrap="square"/>
+                    <a:lstStyle/>
+                    <a:p>
+                      <a:r>
+                        <a:rPr sz="1300" b="0">
+                          <a:solidFill>
+                            <a:srgbClr val="535C6A"/>
+                          </a:solidFill>
+                          <a:latin typeface="Segoe UI"/>
+                        </a:rPr>
+                        <a:t>The golden dataset</a:t>
+                      </a:r>
+                    </a:p>
+                  </a:txBody>
+                  <a:tcPr anchor="ctr" marL="82296" marR="54864" marT="18288" marB="18288">
+                    <a:solidFill>
+                      <a:srgbClr val="FFFFFF"/>
+                    </a:solidFill>
+                  </a:tcPr>
+                </a:tc>
+              </a:tr>
+              <a:tr h="548640">
+                <a:tc>
+                  <a:txBody>
+                    <a:bodyPr wrap="square"/>
+                    <a:lstStyle/>
+                    <a:p>
+                      <a:r>
+                        <a:rPr sz="1300" b="1">
+                          <a:solidFill>
+                            <a:srgbClr val="1A1F27"/>
+                          </a:solidFill>
+                          <a:latin typeface="Segoe UI"/>
+                        </a:rPr>
+                        <a:t>2</a:t>
+                      </a:r>
+                    </a:p>
+                  </a:txBody>
+                  <a:tcPr anchor="ctr" marL="82296" marR="54864" marT="18288" marB="18288">
+                    <a:solidFill>
+                      <a:srgbClr val="F7F9F8"/>
+                    </a:solidFill>
+                  </a:tcPr>
+                </a:tc>
+                <a:tc>
+                  <a:txBody>
+                    <a:bodyPr wrap="square"/>
+                    <a:lstStyle/>
+                    <a:p>
+                      <a:r>
+                        <a:rPr sz="1300" b="0">
+                          <a:solidFill>
+                            <a:srgbClr val="535C6A"/>
+                          </a:solidFill>
+                          <a:latin typeface="Segoe UI"/>
+                        </a:rPr>
+                        <a:t>Confirm the flagged ambiguous KPI definitions</a:t>
+                      </a:r>
+                    </a:p>
+                  </a:txBody>
+                  <a:tcPr anchor="ctr" marL="82296" marR="54864" marT="18288" marB="18288">
+                    <a:solidFill>
+                      <a:srgbClr val="F7F9F8"/>
+                    </a:solidFill>
+                  </a:tcPr>
+                </a:tc>
+                <a:tc>
+                  <a:txBody>
+                    <a:bodyPr wrap="square"/>
+                    <a:lstStyle/>
+                    <a:p>
+                      <a:r>
+                        <a:rPr sz="1300" b="0">
+                          <a:solidFill>
+                            <a:srgbClr val="535C6A"/>
+                          </a:solidFill>
+                          <a:latin typeface="Segoe UI"/>
+                        </a:rPr>
+                        <a:t>Correct metrics</a:t>
+                      </a:r>
+                    </a:p>
+                  </a:txBody>
+                  <a:tcPr anchor="ctr" marL="82296" marR="54864" marT="18288" marB="18288">
+                    <a:solidFill>
+                      <a:srgbClr val="F7F9F8"/>
+                    </a:solidFill>
+                  </a:tcPr>
+                </a:tc>
+              </a:tr>
+              <a:tr h="548640">
+                <a:tc>
+                  <a:txBody>
+                    <a:bodyPr wrap="square"/>
+                    <a:lstStyle/>
+                    <a:p>
+                      <a:r>
+                        <a:rPr sz="1300" b="1">
+                          <a:solidFill>
+                            <a:srgbClr val="1A1F27"/>
+                          </a:solidFill>
+                          <a:latin typeface="Segoe UI"/>
+                        </a:rPr>
+                        <a:t>3</a:t>
+                      </a:r>
+                    </a:p>
+                  </a:txBody>
+                  <a:tcPr anchor="ctr" marL="82296" marR="54864" marT="18288" marB="18288">
+                    <a:solidFill>
+                      <a:srgbClr val="FFFFFF"/>
+                    </a:solidFill>
+                  </a:tcPr>
+                </a:tc>
+                <a:tc>
+                  <a:txBody>
+                    <a:bodyPr wrap="square"/>
+                    <a:lstStyle/>
+                    <a:p>
+                      <a:r>
+                        <a:rPr sz="1300" b="0">
+                          <a:solidFill>
+                            <a:srgbClr val="535C6A"/>
+                          </a:solidFill>
+                          <a:latin typeface="Segoe UI"/>
+                        </a:rPr>
+                        <a:t>Define what makes a coaching recommendation “good”</a:t>
+                      </a:r>
+                    </a:p>
+                  </a:txBody>
+                  <a:tcPr anchor="ctr" marL="82296" marR="54864" marT="18288" marB="18288">
+                    <a:solidFill>
+                      <a:srgbClr val="FFFFFF"/>
+                    </a:solidFill>
+                  </a:tcPr>
+                </a:tc>
+                <a:tc>
+                  <a:txBody>
+                    <a:bodyPr wrap="square"/>
+                    <a:lstStyle/>
+                    <a:p>
+                      <a:r>
+                        <a:rPr sz="1300" b="0">
+                          <a:solidFill>
+                            <a:srgbClr val="535C6A"/>
+                          </a:solidFill>
+                          <a:latin typeface="Segoe UI"/>
+                        </a:rPr>
+                        <a:t>The coaching rubric</a:t>
+                      </a:r>
+                    </a:p>
+                  </a:txBody>
+                  <a:tcPr anchor="ctr" marL="82296" marR="54864" marT="18288" marB="18288">
+                    <a:solidFill>
+                      <a:srgbClr val="FFFFFF"/>
+                    </a:solidFill>
+                  </a:tcPr>
+                </a:tc>
+              </a:tr>
+              <a:tr h="548640">
+                <a:tc>
+                  <a:txBody>
+                    <a:bodyPr wrap="square"/>
+                    <a:lstStyle/>
+                    <a:p>
+                      <a:r>
+                        <a:rPr sz="1300" b="1">
+                          <a:solidFill>
+                            <a:srgbClr val="1A1F27"/>
+                          </a:solidFill>
+                          <a:latin typeface="Segoe UI"/>
+                        </a:rPr>
+                        <a:t>4</a:t>
+                      </a:r>
+                    </a:p>
+                  </a:txBody>
+                  <a:tcPr anchor="ctr" marL="82296" marR="54864" marT="18288" marB="18288">
+                    <a:solidFill>
+                      <a:srgbClr val="F7F9F8"/>
+                    </a:solidFill>
+                  </a:tcPr>
+                </a:tc>
+                <a:tc>
+                  <a:txBody>
+                    <a:bodyPr wrap="square"/>
+                    <a:lstStyle/>
+                    <a:p>
+                      <a:r>
+                        <a:rPr sz="1300" b="0">
+                          <a:solidFill>
+                            <a:srgbClr val="535C6A"/>
+                          </a:solidFill>
+                          <a:latin typeface="Segoe UI"/>
+                        </a:rPr>
+                        <a:t>Set the acceptable range per KPI</a:t>
+                      </a:r>
+                    </a:p>
+                  </a:txBody>
+                  <a:tcPr anchor="ctr" marL="82296" marR="54864" marT="18288" marB="18288">
+                    <a:solidFill>
+                      <a:srgbClr val="F7F9F8"/>
+                    </a:solidFill>
+                  </a:tcPr>
+                </a:tc>
+                <a:tc>
+                  <a:txBody>
+                    <a:bodyPr wrap="square"/>
+                    <a:lstStyle/>
+                    <a:p>
+                      <a:r>
+                        <a:rPr sz="1300" b="0">
+                          <a:solidFill>
+                            <a:srgbClr val="535C6A"/>
+                          </a:solidFill>
+                          <a:latin typeface="Segoe UI"/>
+                        </a:rPr>
+                        <a:t>The evaluation threshold</a:t>
+                      </a:r>
+                    </a:p>
+                  </a:txBody>
+                  <a:tcPr anchor="ctr" marL="82296" marR="54864" marT="18288" marB="18288">
+                    <a:solidFill>
+                      <a:srgbClr val="F7F9F8"/>
+                    </a:solidFill>
+                  </a:tcPr>
+                </a:tc>
+              </a:tr>
+              <a:tr h="548640">
+                <a:tc>
+                  <a:txBody>
+                    <a:bodyPr wrap="square"/>
+                    <a:lstStyle/>
+                    <a:p>
+                      <a:r>
+                        <a:rPr sz="1300" b="1">
+                          <a:solidFill>
+                            <a:srgbClr val="1A1F27"/>
+                          </a:solidFill>
+                          <a:latin typeface="Segoe UI"/>
+                        </a:rPr>
+                        <a:t>5</a:t>
+                      </a:r>
+                    </a:p>
+                  </a:txBody>
+                  <a:tcPr anchor="ctr" marL="82296" marR="54864" marT="18288" marB="18288">
+                    <a:solidFill>
+                      <a:srgbClr val="FFFFFF"/>
+                    </a:solidFill>
+                  </a:tcPr>
+                </a:tc>
+                <a:tc>
+                  <a:txBody>
+                    <a:bodyPr wrap="square"/>
+                    <a:lstStyle/>
+                    <a:p>
+                      <a:r>
+                        <a:rPr sz="1300" b="0">
+                          <a:solidFill>
+                            <a:srgbClr val="535C6A"/>
+                          </a:solidFill>
+                          <a:latin typeface="Segoe UI"/>
+                        </a:rPr>
+                        <a:t>Confirm operational metrics exist for WCC &amp; PSO</a:t>
+                      </a:r>
+                    </a:p>
+                  </a:txBody>
+                  <a:tcPr anchor="ctr" marL="82296" marR="54864" marT="18288" marB="18288">
+                    <a:solidFill>
+                      <a:srgbClr val="FFFFFF"/>
+                    </a:solidFill>
+                  </a:tcPr>
+                </a:tc>
+                <a:tc>
+                  <a:txBody>
+                    <a:bodyPr wrap="square"/>
+                    <a:lstStyle/>
+                    <a:p>
+                      <a:r>
+                        <a:rPr sz="1300" b="0">
+                          <a:solidFill>
+                            <a:srgbClr val="535C6A"/>
+                          </a:solidFill>
+                          <a:latin typeface="Segoe UI"/>
+                        </a:rPr>
+                        <a:t>Coaching-data coverage</a:t>
+                      </a:r>
+                    </a:p>
+                  </a:txBody>
+                  <a:tcPr anchor="ctr" marL="82296" marR="54864" marT="18288" marB="18288">
+                    <a:solidFill>
+                      <a:srgbClr val="FFFFFF"/>
+                    </a:solidFill>
+                  </a:tcPr>
+                </a:tc>
+              </a:tr>
+            </a:tbl>
+          </a:graphicData>
+        </a:graphic>
+      </p:graphicFrame>
+    </p:spTree>
+  </p:cSld>
+  <p:clrMapOvr>
+    <a:masterClrMapping/>
+  </p:clrMapOvr>
+</p:sld>
+</file>
+
+<file path=ppt/slides/slide9.xml><?xml version="1.0" encoding="utf-8"?>
+<p:sld xmlns:a="http://schemas.openxmlformats.org/drawingml/2006/main" xmlns:p="http://schemas.openxmlformats.org/presentationml/2006/main" xmlns:r="http://schemas.openxmlformats.org/officeDocument/2006/relationships">
+  <p:cSld>
+    <p:bg>
+      <p:bgPr>
+        <a:solidFill>
+          <a:srgbClr val="FFFFFF"/>
+        </a:solidFill>
+        <a:effectLst/>
+      </p:bgPr>
+    </p:bg>
+    <p:spTree>
+      <p:nvGrpSpPr>
+        <p:cNvPr id="1" name=""/>
+        <p:cNvGrpSpPr/>
+        <p:nvPr/>
+      </p:nvGrpSpPr>
+      <p:grpSpPr/>
+      <p:sp>
+        <p:nvSpPr>
+          <p:cNvPr id="2" name="Rectangle 1"/>
+          <p:cNvSpPr/>
+          <p:nvPr/>
+        </p:nvSpPr>
+        <p:spPr>
+          <a:xfrm>
+            <a:off x="0" y="0"/>
+            <a:ext cx="12191695" cy="128016"/>
+          </a:xfrm>
+          <a:prstGeom prst="rect">
+            <a:avLst/>
+          </a:prstGeom>
+          <a:solidFill>
+            <a:srgbClr val="0E7C74"/>
+          </a:solidFill>
+          <a:ln>
+            <a:noFill/>
+          </a:ln>
+        </p:spPr>
+        <p:style>
+          <a:lnRef idx="1">
+            <a:schemeClr val="accent1"/>
+          </a:lnRef>
+          <a:fillRef idx="3">
+            <a:schemeClr val="accent1"/>
+          </a:fillRef>
+          <a:effectRef idx="2">
+            <a:schemeClr val="accent1"/>
+          </a:effectRef>
+          <a:fontRef idx="minor">
+            <a:schemeClr val="lt1"/>
+          </a:fontRef>
+        </p:style>
+        <p:txBody>
+          <a:bodyPr rtlCol="0" anchor="ctr"/>
+          <a:lstStyle/>
+          <a:p>
+            <a:pPr algn="ctr"/>
           </a:p>
         </p:txBody>
       </p:sp>
       <p:sp>
         <p:nvSpPr>
-          <p:cNvPr id="4" name="TextBox 3"/>
+          <p:cNvPr id="3" name="TextBox 2"/>
           <p:cNvSpPr txBox="1"/>
           <p:nvPr/>
         </p:nvSpPr>
         <p:spPr>
           <a:xfrm>
-            <a:off x="685800" y="1965960"/>
-            <a:ext cx="10881360" cy="4297680"/>
+            <a:off x="640080" y="384048"/>
+            <a:ext cx="11155680" cy="1280160"/>
           </a:xfrm>
           <a:prstGeom prst="rect">
             <a:avLst/>
@@ -5044,6 +8559,61 @@
           <a:p>
             <a:pPr>
               <a:spcAft>
+                <a:spcPts val="500"/>
+              </a:spcAft>
+            </a:pPr>
+            <a:r>
+              <a:rPr sz="1250" b="1">
+                <a:solidFill>
+                  <a:srgbClr val="0E7C74"/>
+                </a:solidFill>
+                <a:latin typeface="Segoe UI"/>
+              </a:rPr>
+              <a:t>NEXT</a:t>
+            </a:r>
+          </a:p>
+          <a:p>
+            <a:pPr>
+              <a:spcAft>
+                <a:spcPts val="0"/>
+              </a:spcAft>
+            </a:pPr>
+            <a:r>
+              <a:rPr sz="2700" b="1">
+                <a:solidFill>
+                  <a:srgbClr val="1A1F27"/>
+                </a:solidFill>
+                <a:latin typeface="Segoe UI"/>
+              </a:rPr>
+              <a:t>Proposed next steps</a:t>
+            </a:r>
+          </a:p>
+        </p:txBody>
+      </p:sp>
+      <p:sp>
+        <p:nvSpPr>
+          <p:cNvPr id="4" name="TextBox 3"/>
+          <p:cNvSpPr txBox="1"/>
+          <p:nvPr/>
+        </p:nvSpPr>
+        <p:spPr>
+          <a:xfrm>
+            <a:off x="685800" y="1920240"/>
+            <a:ext cx="10881360" cy="4206240"/>
+          </a:xfrm>
+          <a:prstGeom prst="rect">
+            <a:avLst/>
+          </a:prstGeom>
+          <a:noFill/>
+        </p:spPr>
+        <p:txBody>
+          <a:bodyPr wrap="square">
+            <a:spAutoFit/>
+          </a:bodyPr>
+          <a:lstStyle/>
+          <a:p>
+            <a:pPr>
+              <a:spcAft>
                 <a:spcPts val="1600"/>
               </a:spcAft>
             </a:pPr>
@@ -5054,7 +8624,7 @@
                 </a:solidFill>
                 <a:latin typeface="Segoe UI"/>
               </a:rPr>
-              <a:t>1.   Agree the golden-data sample and certification approach with coaches.</a:t>
+              <a:t>1.   Agree the golden-call sample &amp; certification with coaches.</a:t>
             </a:r>
           </a:p>
           <a:p>
